--- a/python_course/chapter_07_functions/functions.pptx
+++ b/python_course/chapter_07_functions/functions.pptx
@@ -16,8 +16,6 @@
     <p:sldId id="264" r:id="rId15"/>
     <p:sldId id="265" r:id="rId16"/>
     <p:sldId id="266" r:id="rId17"/>
-    <p:sldId id="267" r:id="rId18"/>
-    <p:sldId id="268" r:id="rId19"/>
   </p:sldIdLst>
   <p:sldSz cx="12191695" cy="6858000" type="screen4x3"/>
   <p:notesSz cx="6858000" cy="9144000"/>
@@ -3151,8 +3149,8 @@
         </p:nvSpPr>
         <p:spPr>
           <a:xfrm>
-            <a:off x="914400" y="1828800"/>
-            <a:ext cx="10360152" cy="1371600"/>
+            <a:off x="914400" y="2286000"/>
+            <a:ext cx="10360152" cy="1097280"/>
           </a:xfrm>
           <a:prstGeom prst="rect">
             <a:avLst/>
@@ -3166,14 +3164,14 @@
           <a:lstStyle/>
           <a:p>
             <a:pPr algn="ctr">
-              <a:defRPr sz="5400" b="1">
+              <a:defRPr sz="4800" b="1">
                 <a:solidFill>
                   <a:srgbClr val="003366"/>
                 </a:solidFill>
               </a:defRPr>
             </a:pPr>
             <a:r>
-              <a:t>Chapter 7</a:t>
+              <a:t>Chapter 7: Functions</a:t>
             </a:r>
           </a:p>
         </p:txBody>
@@ -3187,7 +3185,7 @@
         <p:spPr>
           <a:xfrm>
             <a:off x="914400" y="3657600"/>
-            <a:ext cx="10360152" cy="548640"/>
+            <a:ext cx="10360152" cy="731520"/>
           </a:xfrm>
           <a:prstGeom prst="rect">
             <a:avLst/>
@@ -3208,42 +3206,7 @@
               </a:defRPr>
             </a:pPr>
             <a:r>
-              <a:t>Functions - Reusable Code</a:t>
-            </a:r>
-          </a:p>
-        </p:txBody>
-      </p:sp>
-      <p:sp>
-        <p:nvSpPr>
-          <p:cNvPr id="5" name="TextBox 4"/>
-          <p:cNvSpPr txBox="1"/>
-          <p:nvPr/>
-        </p:nvSpPr>
-        <p:spPr>
-          <a:xfrm>
-            <a:off x="914400" y="4297680"/>
-            <a:ext cx="10360152" cy="548640"/>
-          </a:xfrm>
-          <a:prstGeom prst="rect">
-            <a:avLst/>
-          </a:prstGeom>
-          <a:noFill/>
-        </p:spPr>
-        <p:txBody>
-          <a:bodyPr wrap="none">
-            <a:spAutoFit/>
-          </a:bodyPr>
-          <a:lstStyle/>
-          <a:p>
-            <a:pPr algn="ctr">
-              <a:defRPr sz="2800">
-                <a:solidFill>
-                  <a:srgbClr val="4682B4"/>
-                </a:solidFill>
-              </a:defRPr>
-            </a:pPr>
-            <a:r>
-              <a:t>Write Once, Use Everywhere</a:t>
+              <a:t>Reusable Code and Modularity</a:t>
             </a:r>
           </a:p>
         </p:txBody>
@@ -3360,8 +3323,8 @@
         </p:nvSpPr>
         <p:spPr>
           <a:xfrm>
-            <a:off x="457200" y="365760"/>
-            <a:ext cx="10972800" cy="731520"/>
+            <a:off x="457200" y="320040"/>
+            <a:ext cx="10972800" cy="640080"/>
           </a:xfrm>
           <a:prstGeom prst="rect">
             <a:avLst/>
@@ -3375,71 +3338,28 @@
           <a:lstStyle/>
           <a:p>
             <a:pPr>
-              <a:defRPr sz="4000" b="1">
+              <a:defRPr sz="3600" b="1">
                 <a:solidFill>
                   <a:srgbClr val="003366"/>
                 </a:solidFill>
               </a:defRPr>
             </a:pPr>
             <a:r>
-              <a:t>Lambda Functions ⚡</a:t>
-            </a:r>
-          </a:p>
-        </p:txBody>
-      </p:sp>
-      <p:sp>
-        <p:nvSpPr>
-          <p:cNvPr id="5" name="Rectangle 4"/>
-          <p:cNvSpPr/>
+              <a:t>Best Practices</a:t>
+            </a:r>
+          </a:p>
+        </p:txBody>
+      </p:sp>
+      <p:sp>
+        <p:nvSpPr>
+          <p:cNvPr id="5" name="TextBox 4"/>
+          <p:cNvSpPr txBox="1"/>
           <p:nvPr/>
         </p:nvSpPr>
         <p:spPr>
           <a:xfrm>
-            <a:off x="457200" y="1005840"/>
-            <a:ext cx="1828800" cy="45720"/>
-          </a:xfrm>
-          <a:prstGeom prst="rect">
-            <a:avLst/>
-          </a:prstGeom>
-          <a:solidFill>
-            <a:srgbClr val="0066CC"/>
-          </a:solidFill>
-          <a:ln>
-            <a:noFill/>
-          </a:ln>
-        </p:spPr>
-        <p:style>
-          <a:lnRef idx="1">
-            <a:schemeClr val="accent1"/>
-          </a:lnRef>
-          <a:fillRef idx="3">
-            <a:schemeClr val="accent1"/>
-          </a:fillRef>
-          <a:effectRef idx="2">
-            <a:schemeClr val="accent1"/>
-          </a:effectRef>
-          <a:fontRef idx="minor">
-            <a:schemeClr val="lt1"/>
-          </a:fontRef>
-        </p:style>
-        <p:txBody>
-          <a:bodyPr rtlCol="0" anchor="ctr"/>
-          <a:lstStyle/>
-          <a:p>
-            <a:pPr algn="ctr"/>
-          </a:p>
-        </p:txBody>
-      </p:sp>
-      <p:sp>
-        <p:nvSpPr>
-          <p:cNvPr id="6" name="TextBox 5"/>
-          <p:cNvSpPr txBox="1"/>
-          <p:nvPr/>
-        </p:nvSpPr>
-        <p:spPr>
-          <a:xfrm>
-            <a:off x="640080" y="1371600"/>
-            <a:ext cx="10789920" cy="4572000"/>
+            <a:off x="640080" y="1188720"/>
+            <a:ext cx="10789920" cy="5303520"/>
           </a:xfrm>
           <a:prstGeom prst="rect">
             <a:avLst/>
@@ -3454,61 +3374,271 @@
           <a:p>
             <a:pPr>
               <a:spcAft>
-                <a:spcPts val="800"/>
-              </a:spcAft>
-              <a:defRPr sz="2000" b="1">
-                <a:solidFill>
-                  <a:srgbClr val="333333"/>
-                </a:solidFill>
-              </a:defRPr>
-            </a:pPr>
-            <a:r>
-              <a:t>Optional/Advanced:Small, anonymous functions for simple operations</a:t>
-            </a:r>
-          </a:p>
-          <a:p>
-            <a:pPr>
-              <a:spcAft>
-                <a:spcPts val="800"/>
-              </a:spcAft>
-              <a:defRPr sz="2000" b="1">
-                <a:solidFill>
-                  <a:srgbClr val="333333"/>
-                </a:solidFill>
-              </a:defRPr>
-            </a:pPr>
-            <a:r>
-              <a:t>Regular Function</a:t>
-            </a:r>
-          </a:p>
-          <a:p>
-            <a:pPr>
-              <a:spcAft>
-                <a:spcPts val="800"/>
-              </a:spcAft>
-              <a:defRPr sz="2000" b="1">
-                <a:solidFill>
-                  <a:srgbClr val="333333"/>
-                </a:solidFill>
-              </a:defRPr>
-            </a:pPr>
-            <a:r>
-              <a:t>Lambda Function</a:t>
-            </a:r>
-          </a:p>
-          <a:p>
-            <a:pPr>
-              <a:spcAft>
-                <a:spcPts val="800"/>
-              </a:spcAft>
-              <a:defRPr sz="2000" b="1">
-                <a:solidFill>
-                  <a:srgbClr val="333333"/>
-                </a:solidFill>
-              </a:defRPr>
-            </a:pPr>
-            <a:r>
-              <a:t>Common Use Cases:</a:t>
+                <a:spcPts val="600"/>
+              </a:spcAft>
+              <a:defRPr b="1" sz="2000">
+                <a:solidFill>
+                  <a:srgbClr val="333333"/>
+                </a:solidFill>
+              </a:defRPr>
+            </a:pPr>
+            <a:r>
+              <a:t>Function Design:</a:t>
+            </a:r>
+          </a:p>
+          <a:p>
+            <a:pPr lvl="1">
+              <a:spcAft>
+                <a:spcPts val="400"/>
+              </a:spcAft>
+              <a:defRPr sz="1600">
+                <a:solidFill>
+                  <a:srgbClr val="333333"/>
+                </a:solidFill>
+              </a:defRPr>
+            </a:pPr>
+            <a:r>
+              <a:t>• Do one thing well</a:t>
+            </a:r>
+          </a:p>
+          <a:p>
+            <a:pPr lvl="1">
+              <a:spcAft>
+                <a:spcPts val="400"/>
+              </a:spcAft>
+              <a:defRPr sz="1600">
+                <a:solidFill>
+                  <a:srgbClr val="333333"/>
+                </a:solidFill>
+              </a:defRPr>
+            </a:pPr>
+            <a:r>
+              <a:t>• Keep functions short (&lt; 20 lines)</a:t>
+            </a:r>
+          </a:p>
+          <a:p>
+            <a:pPr lvl="1">
+              <a:spcAft>
+                <a:spcPts val="400"/>
+              </a:spcAft>
+              <a:defRPr sz="1600">
+                <a:solidFill>
+                  <a:srgbClr val="333333"/>
+                </a:solidFill>
+              </a:defRPr>
+            </a:pPr>
+            <a:r>
+              <a:t>• Use descriptive names</a:t>
+            </a:r>
+          </a:p>
+          <a:p>
+            <a:pPr lvl="1">
+              <a:spcAft>
+                <a:spcPts val="400"/>
+              </a:spcAft>
+              <a:defRPr sz="1600">
+                <a:solidFill>
+                  <a:srgbClr val="333333"/>
+                </a:solidFill>
+              </a:defRPr>
+            </a:pPr>
+            <a:r>
+              <a:t>• Document with docstrings</a:t>
+            </a:r>
+          </a:p>
+          <a:p>
+            <a:pPr>
+              <a:spcAft>
+                <a:spcPts val="600"/>
+              </a:spcAft>
+              <a:defRPr b="1" sz="2000">
+                <a:solidFill>
+                  <a:srgbClr val="333333"/>
+                </a:solidFill>
+              </a:defRPr>
+            </a:pPr>
+            <a:r>
+              <a:t>Parameters:</a:t>
+            </a:r>
+          </a:p>
+          <a:p>
+            <a:pPr lvl="1">
+              <a:spcAft>
+                <a:spcPts val="400"/>
+              </a:spcAft>
+              <a:defRPr sz="1600">
+                <a:solidFill>
+                  <a:srgbClr val="333333"/>
+                </a:solidFill>
+              </a:defRPr>
+            </a:pPr>
+            <a:r>
+              <a:t>• Limit to 3-4 parameters</a:t>
+            </a:r>
+          </a:p>
+          <a:p>
+            <a:pPr lvl="1">
+              <a:spcAft>
+                <a:spcPts val="400"/>
+              </a:spcAft>
+              <a:defRPr sz="1600">
+                <a:solidFill>
+                  <a:srgbClr val="333333"/>
+                </a:solidFill>
+              </a:defRPr>
+            </a:pPr>
+            <a:r>
+              <a:t>• Use default values wisely</a:t>
+            </a:r>
+          </a:p>
+          <a:p>
+            <a:pPr lvl="1">
+              <a:spcAft>
+                <a:spcPts val="400"/>
+              </a:spcAft>
+              <a:defRPr sz="1600">
+                <a:solidFill>
+                  <a:srgbClr val="333333"/>
+                </a:solidFill>
+              </a:defRPr>
+            </a:pPr>
+            <a:r>
+              <a:t>• Avoid mutable defaults</a:t>
+            </a:r>
+          </a:p>
+          <a:p>
+            <a:pPr>
+              <a:spcAft>
+                <a:spcPts val="600"/>
+              </a:spcAft>
+              <a:defRPr b="1" sz="2000">
+                <a:solidFill>
+                  <a:srgbClr val="333333"/>
+                </a:solidFill>
+              </a:defRPr>
+            </a:pPr>
+            <a:r>
+              <a:t>Return Values:</a:t>
+            </a:r>
+          </a:p>
+          <a:p>
+            <a:pPr lvl="1">
+              <a:spcAft>
+                <a:spcPts val="400"/>
+              </a:spcAft>
+              <a:defRPr sz="1600">
+                <a:solidFill>
+                  <a:srgbClr val="333333"/>
+                </a:solidFill>
+              </a:defRPr>
+            </a:pPr>
+            <a:r>
+              <a:t>• Be consistent with types</a:t>
+            </a:r>
+          </a:p>
+          <a:p>
+            <a:pPr lvl="1">
+              <a:spcAft>
+                <a:spcPts val="400"/>
+              </a:spcAft>
+              <a:defRPr sz="1600">
+                <a:solidFill>
+                  <a:srgbClr val="333333"/>
+                </a:solidFill>
+              </a:defRPr>
+            </a:pPr>
+            <a:r>
+              <a:t>• Return early on errors</a:t>
+            </a:r>
+          </a:p>
+          <a:p>
+            <a:pPr lvl="1">
+              <a:spcAft>
+                <a:spcPts val="400"/>
+              </a:spcAft>
+              <a:defRPr sz="1600">
+                <a:solidFill>
+                  <a:srgbClr val="333333"/>
+                </a:solidFill>
+              </a:defRPr>
+            </a:pPr>
+            <a:r>
+              <a:t>• Avoid returning None sometimes</a:t>
+            </a:r>
+          </a:p>
+          <a:p>
+            <a:pPr>
+              <a:spcAft>
+                <a:spcPts val="600"/>
+              </a:spcAft>
+              <a:defRPr b="1" sz="2000">
+                <a:solidFill>
+                  <a:srgbClr val="333333"/>
+                </a:solidFill>
+              </a:defRPr>
+            </a:pPr>
+            <a:r>
+              <a:t>Common Patterns:</a:t>
+            </a:r>
+          </a:p>
+          <a:p>
+            <a:pPr lvl="1">
+              <a:spcAft>
+                <a:spcPts val="400"/>
+              </a:spcAft>
+              <a:defRPr sz="1600">
+                <a:solidFill>
+                  <a:srgbClr val="333333"/>
+                </a:solidFill>
+              </a:defRPr>
+            </a:pPr>
+            <a:r>
+              <a:t>• Validation at start</a:t>
+            </a:r>
+          </a:p>
+          <a:p>
+            <a:pPr lvl="1">
+              <a:spcAft>
+                <a:spcPts val="400"/>
+              </a:spcAft>
+              <a:defRPr sz="1600">
+                <a:solidFill>
+                  <a:srgbClr val="333333"/>
+                </a:solidFill>
+              </a:defRPr>
+            </a:pPr>
+            <a:r>
+              <a:t>• Single return point (or early returns)</a:t>
+            </a:r>
+          </a:p>
+          <a:p>
+            <a:pPr lvl="1">
+              <a:spcAft>
+                <a:spcPts val="400"/>
+              </a:spcAft>
+              <a:defRPr sz="1600">
+                <a:solidFill>
+                  <a:srgbClr val="333333"/>
+                </a:solidFill>
+              </a:defRPr>
+            </a:pPr>
+            <a:r>
+              <a:t>• Clear variable names</a:t>
+            </a:r>
+          </a:p>
+          <a:p>
+            <a:pPr lvl="1">
+              <a:spcAft>
+                <a:spcPts val="400"/>
+              </a:spcAft>
+              <a:defRPr sz="1600">
+                <a:solidFill>
+                  <a:srgbClr val="333333"/>
+                </a:solidFill>
+              </a:defRPr>
+            </a:pPr>
+            <a:r>
+              <a:t>• Comments for complex logic</a:t>
             </a:r>
           </a:p>
         </p:txBody>
@@ -3625,8 +3755,8 @@
         </p:nvSpPr>
         <p:spPr>
           <a:xfrm>
-            <a:off x="457200" y="365760"/>
-            <a:ext cx="10972800" cy="731520"/>
+            <a:off x="457200" y="320040"/>
+            <a:ext cx="10972800" cy="640080"/>
           </a:xfrm>
           <a:prstGeom prst="rect">
             <a:avLst/>
@@ -3640,71 +3770,28 @@
           <a:lstStyle/>
           <a:p>
             <a:pPr>
-              <a:defRPr sz="4000" b="1">
+              <a:defRPr sz="3600" b="1">
                 <a:solidFill>
                   <a:srgbClr val="003366"/>
                 </a:solidFill>
               </a:defRPr>
             </a:pPr>
             <a:r>
-              <a:t>Real-World Example 🌍</a:t>
-            </a:r>
-          </a:p>
-        </p:txBody>
-      </p:sp>
-      <p:sp>
-        <p:nvSpPr>
-          <p:cNvPr id="5" name="Rectangle 4"/>
-          <p:cNvSpPr/>
+              <a:t>Common Mistakes</a:t>
+            </a:r>
+          </a:p>
+        </p:txBody>
+      </p:sp>
+      <p:sp>
+        <p:nvSpPr>
+          <p:cNvPr id="5" name="TextBox 4"/>
+          <p:cNvSpPr txBox="1"/>
           <p:nvPr/>
         </p:nvSpPr>
         <p:spPr>
           <a:xfrm>
-            <a:off x="457200" y="1005840"/>
-            <a:ext cx="1828800" cy="45720"/>
-          </a:xfrm>
-          <a:prstGeom prst="rect">
-            <a:avLst/>
-          </a:prstGeom>
-          <a:solidFill>
-            <a:srgbClr val="0066CC"/>
-          </a:solidFill>
-          <a:ln>
-            <a:noFill/>
-          </a:ln>
-        </p:spPr>
-        <p:style>
-          <a:lnRef idx="1">
-            <a:schemeClr val="accent1"/>
-          </a:lnRef>
-          <a:fillRef idx="3">
-            <a:schemeClr val="accent1"/>
-          </a:fillRef>
-          <a:effectRef idx="2">
-            <a:schemeClr val="accent1"/>
-          </a:effectRef>
-          <a:fontRef idx="minor">
-            <a:schemeClr val="lt1"/>
-          </a:fontRef>
-        </p:style>
-        <p:txBody>
-          <a:bodyPr rtlCol="0" anchor="ctr"/>
-          <a:lstStyle/>
-          <a:p>
-            <a:pPr algn="ctr"/>
-          </a:p>
-        </p:txBody>
-      </p:sp>
-      <p:sp>
-        <p:nvSpPr>
-          <p:cNvPr id="6" name="TextBox 5"/>
-          <p:cNvSpPr txBox="1"/>
-          <p:nvPr/>
-        </p:nvSpPr>
-        <p:spPr>
-          <a:xfrm>
-            <a:off x="640080" y="1371600"/>
-            <a:ext cx="10789920" cy="4572000"/>
+            <a:off x="640080" y="1188720"/>
+            <a:ext cx="10789920" cy="5303520"/>
           </a:xfrm>
           <a:prstGeom prst="rect">
             <a:avLst/>
@@ -3719,16 +3806,286 @@
           <a:p>
             <a:pPr>
               <a:spcAft>
-                <a:spcPts val="800"/>
-              </a:spcAft>
-              <a:defRPr sz="2000" b="1">
-                <a:solidFill>
-                  <a:srgbClr val="333333"/>
-                </a:solidFill>
-              </a:defRPr>
-            </a:pPr>
-            <a:r>
-              <a:t>Temperature Converter</a:t>
+                <a:spcPts val="600"/>
+              </a:spcAft>
+              <a:defRPr b="1" sz="2000">
+                <a:solidFill>
+                  <a:srgbClr val="333333"/>
+                </a:solidFill>
+              </a:defRPr>
+            </a:pPr>
+            <a:r>
+              <a:t>Mistake 1: Forgetting return</a:t>
+            </a:r>
+          </a:p>
+          <a:p>
+            <a:pPr>
+              <a:spcAft>
+                <a:spcPts val="600"/>
+              </a:spcAft>
+              <a:defRPr b="1" sz="2000">
+                <a:solidFill>
+                  <a:srgbClr val="333333"/>
+                </a:solidFill>
+              </a:defRPr>
+            </a:pPr>
+            <a:r>
+              <a:t>def add(a, b):</a:t>
+            </a:r>
+          </a:p>
+          <a:p>
+            <a:pPr>
+              <a:spcAft>
+                <a:spcPts val="600"/>
+              </a:spcAft>
+              <a:defRPr sz="1600">
+                <a:solidFill>
+                  <a:srgbClr val="333333"/>
+                </a:solidFill>
+              </a:defRPr>
+            </a:pPr>
+            <a:r>
+              <a:t>    result = a + b  # No return!</a:t>
+            </a:r>
+          </a:p>
+          <a:p>
+            <a:pPr>
+              <a:spcAft>
+                <a:spcPts val="600"/>
+              </a:spcAft>
+              <a:defRPr b="1" sz="2000">
+                <a:solidFill>
+                  <a:srgbClr val="333333"/>
+                </a:solidFill>
+              </a:defRPr>
+            </a:pPr>
+            <a:r>
+              <a:t>Mistake 2: Mutable default</a:t>
+            </a:r>
+          </a:p>
+          <a:p>
+            <a:pPr>
+              <a:spcAft>
+                <a:spcPts val="600"/>
+              </a:spcAft>
+              <a:defRPr b="1" sz="2000">
+                <a:solidFill>
+                  <a:srgbClr val="333333"/>
+                </a:solidFill>
+              </a:defRPr>
+            </a:pPr>
+            <a:r>
+              <a:t>def add_item(item, items=[]):</a:t>
+            </a:r>
+          </a:p>
+          <a:p>
+            <a:pPr>
+              <a:spcAft>
+                <a:spcPts val="600"/>
+              </a:spcAft>
+              <a:defRPr sz="1600">
+                <a:solidFill>
+                  <a:srgbClr val="333333"/>
+                </a:solidFill>
+              </a:defRPr>
+            </a:pPr>
+            <a:r>
+              <a:t>    items.append(item)  # Dangerous!</a:t>
+            </a:r>
+          </a:p>
+          <a:p>
+            <a:pPr>
+              <a:spcAft>
+                <a:spcPts val="600"/>
+              </a:spcAft>
+              <a:defRPr sz="1600">
+                <a:solidFill>
+                  <a:srgbClr val="333333"/>
+                </a:solidFill>
+              </a:defRPr>
+            </a:pPr>
+            <a:r>
+              <a:t>    return items</a:t>
+            </a:r>
+          </a:p>
+          <a:p>
+            <a:pPr>
+              <a:spcAft>
+                <a:spcPts val="600"/>
+              </a:spcAft>
+              <a:defRPr b="1" sz="2000">
+                <a:solidFill>
+                  <a:srgbClr val="333333"/>
+                </a:solidFill>
+              </a:defRPr>
+            </a:pPr>
+            <a:r>
+              <a:t>Fix:</a:t>
+            </a:r>
+          </a:p>
+          <a:p>
+            <a:pPr>
+              <a:spcAft>
+                <a:spcPts val="600"/>
+              </a:spcAft>
+              <a:defRPr b="1" sz="2000">
+                <a:solidFill>
+                  <a:srgbClr val="333333"/>
+                </a:solidFill>
+              </a:defRPr>
+            </a:pPr>
+            <a:r>
+              <a:t>def add_item(item, items=None):</a:t>
+            </a:r>
+          </a:p>
+          <a:p>
+            <a:pPr>
+              <a:spcAft>
+                <a:spcPts val="600"/>
+              </a:spcAft>
+              <a:defRPr sz="1600">
+                <a:solidFill>
+                  <a:srgbClr val="333333"/>
+                </a:solidFill>
+              </a:defRPr>
+            </a:pPr>
+            <a:r>
+              <a:t>    if items is None:</a:t>
+            </a:r>
+          </a:p>
+          <a:p>
+            <a:pPr>
+              <a:spcAft>
+                <a:spcPts val="600"/>
+              </a:spcAft>
+              <a:defRPr sz="1600">
+                <a:solidFill>
+                  <a:srgbClr val="333333"/>
+                </a:solidFill>
+              </a:defRPr>
+            </a:pPr>
+            <a:r>
+              <a:t>        items = []</a:t>
+            </a:r>
+          </a:p>
+          <a:p>
+            <a:pPr>
+              <a:spcAft>
+                <a:spcPts val="600"/>
+              </a:spcAft>
+              <a:defRPr sz="1600">
+                <a:solidFill>
+                  <a:srgbClr val="333333"/>
+                </a:solidFill>
+              </a:defRPr>
+            </a:pPr>
+            <a:r>
+              <a:t>    items.append(item)</a:t>
+            </a:r>
+          </a:p>
+          <a:p>
+            <a:pPr>
+              <a:spcAft>
+                <a:spcPts val="600"/>
+              </a:spcAft>
+              <a:defRPr sz="1600">
+                <a:solidFill>
+                  <a:srgbClr val="333333"/>
+                </a:solidFill>
+              </a:defRPr>
+            </a:pPr>
+            <a:r>
+              <a:t>    return items</a:t>
+            </a:r>
+          </a:p>
+          <a:p>
+            <a:pPr>
+              <a:spcAft>
+                <a:spcPts val="600"/>
+              </a:spcAft>
+              <a:defRPr b="1" sz="2000">
+                <a:solidFill>
+                  <a:srgbClr val="333333"/>
+                </a:solidFill>
+              </a:defRPr>
+            </a:pPr>
+            <a:r>
+              <a:t>Mistake 3: print vs return</a:t>
+            </a:r>
+          </a:p>
+          <a:p>
+            <a:pPr>
+              <a:spcAft>
+                <a:spcPts val="600"/>
+              </a:spcAft>
+              <a:defRPr b="1" sz="2000">
+                <a:solidFill>
+                  <a:srgbClr val="333333"/>
+                </a:solidFill>
+              </a:defRPr>
+            </a:pPr>
+            <a:r>
+              <a:t>def add(a, b):</a:t>
+            </a:r>
+          </a:p>
+          <a:p>
+            <a:pPr>
+              <a:spcAft>
+                <a:spcPts val="600"/>
+              </a:spcAft>
+              <a:defRPr sz="1600">
+                <a:solidFill>
+                  <a:srgbClr val="333333"/>
+                </a:solidFill>
+              </a:defRPr>
+            </a:pPr>
+            <a:r>
+              <a:t>    print(a + b)  # Can't use result!</a:t>
+            </a:r>
+          </a:p>
+          <a:p>
+            <a:pPr>
+              <a:spcAft>
+                <a:spcPts val="600"/>
+              </a:spcAft>
+              <a:defRPr b="1" sz="2000">
+                <a:solidFill>
+                  <a:srgbClr val="333333"/>
+                </a:solidFill>
+              </a:defRPr>
+            </a:pPr>
+            <a:r>
+              <a:t>Mistake 4: Modifying arguments</a:t>
+            </a:r>
+          </a:p>
+          <a:p>
+            <a:pPr lvl="1">
+              <a:spcAft>
+                <a:spcPts val="400"/>
+              </a:spcAft>
+              <a:defRPr sz="1600">
+                <a:solidFill>
+                  <a:srgbClr val="333333"/>
+                </a:solidFill>
+              </a:defRPr>
+            </a:pPr>
+            <a:r>
+              <a:t>• Lists and dicts are mutable</a:t>
+            </a:r>
+          </a:p>
+          <a:p>
+            <a:pPr lvl="1">
+              <a:spcAft>
+                <a:spcPts val="400"/>
+              </a:spcAft>
+              <a:defRPr sz="1600">
+                <a:solidFill>
+                  <a:srgbClr val="333333"/>
+                </a:solidFill>
+              </a:defRPr>
+            </a:pPr>
+            <a:r>
+              <a:t>• Changes affect original</a:t>
             </a:r>
           </a:p>
         </p:txBody>
@@ -3741,7 +4098,7 @@
 </p:sld>
 </file>
 
-<file path=ppt/slides/slide12.xml><?xml version="1.0" encoding="utf-8"?>
+<file path=ppt/slides/slide2.xml><?xml version="1.0" encoding="utf-8"?>
 <p:sld xmlns:a="http://schemas.openxmlformats.org/drawingml/2006/main" xmlns:p="http://schemas.openxmlformats.org/presentationml/2006/main" xmlns:r="http://schemas.openxmlformats.org/officeDocument/2006/relationships">
   <p:cSld>
     <p:spTree>
@@ -3845,8 +4202,8 @@
         </p:nvSpPr>
         <p:spPr>
           <a:xfrm>
-            <a:off x="457200" y="365760"/>
-            <a:ext cx="10972800" cy="731520"/>
+            <a:off x="457200" y="320040"/>
+            <a:ext cx="10972800" cy="640080"/>
           </a:xfrm>
           <a:prstGeom prst="rect">
             <a:avLst/>
@@ -3860,71 +4217,28 @@
           <a:lstStyle/>
           <a:p>
             <a:pPr>
-              <a:defRPr sz="4000" b="1">
+              <a:defRPr sz="3600" b="1">
                 <a:solidFill>
                   <a:srgbClr val="003366"/>
                 </a:solidFill>
               </a:defRPr>
             </a:pPr>
             <a:r>
-              <a:t>Why Functions Are Powerful 💪</a:t>
-            </a:r>
-          </a:p>
-        </p:txBody>
-      </p:sp>
-      <p:sp>
-        <p:nvSpPr>
-          <p:cNvPr id="5" name="Rectangle 4"/>
-          <p:cNvSpPr/>
+              <a:t>Why Functions?</a:t>
+            </a:r>
+          </a:p>
+        </p:txBody>
+      </p:sp>
+      <p:sp>
+        <p:nvSpPr>
+          <p:cNvPr id="5" name="TextBox 4"/>
+          <p:cNvSpPr txBox="1"/>
           <p:nvPr/>
         </p:nvSpPr>
         <p:spPr>
           <a:xfrm>
-            <a:off x="457200" y="1005840"/>
-            <a:ext cx="1828800" cy="45720"/>
-          </a:xfrm>
-          <a:prstGeom prst="rect">
-            <a:avLst/>
-          </a:prstGeom>
-          <a:solidFill>
-            <a:srgbClr val="0066CC"/>
-          </a:solidFill>
-          <a:ln>
-            <a:noFill/>
-          </a:ln>
-        </p:spPr>
-        <p:style>
-          <a:lnRef idx="1">
-            <a:schemeClr val="accent1"/>
-          </a:lnRef>
-          <a:fillRef idx="3">
-            <a:schemeClr val="accent1"/>
-          </a:fillRef>
-          <a:effectRef idx="2">
-            <a:schemeClr val="accent1"/>
-          </a:effectRef>
-          <a:fontRef idx="minor">
-            <a:schemeClr val="lt1"/>
-          </a:fontRef>
-        </p:style>
-        <p:txBody>
-          <a:bodyPr rtlCol="0" anchor="ctr"/>
-          <a:lstStyle/>
-          <a:p>
-            <a:pPr algn="ctr"/>
-          </a:p>
-        </p:txBody>
-      </p:sp>
-      <p:sp>
-        <p:nvSpPr>
-          <p:cNvPr id="6" name="TextBox 5"/>
-          <p:cNvSpPr txBox="1"/>
-          <p:nvPr/>
-        </p:nvSpPr>
-        <p:spPr>
-          <a:xfrm>
-            <a:off x="640080" y="1371600"/>
-            <a:ext cx="10789920" cy="4572000"/>
+            <a:off x="640080" y="1188720"/>
+            <a:ext cx="10789920" cy="5303520"/>
           </a:xfrm>
           <a:prstGeom prst="rect">
             <a:avLst/>
@@ -3939,151 +4253,196 @@
           <a:p>
             <a:pPr>
               <a:spcAft>
-                <a:spcPts val="800"/>
-              </a:spcAft>
-              <a:defRPr sz="2000" b="1">
-                <a:solidFill>
-                  <a:srgbClr val="333333"/>
-                </a:solidFill>
-              </a:defRPr>
-            </a:pPr>
-            <a:r>
-              <a:t>✓ Reusable</a:t>
-            </a:r>
-          </a:p>
-          <a:p>
-            <a:pPr>
-              <a:spcAft>
-                <a:spcPts val="800"/>
-              </a:spcAft>
-              <a:defRPr sz="2000" b="1">
-                <a:solidFill>
-                  <a:srgbClr val="333333"/>
-                </a:solidFill>
-              </a:defRPr>
-            </a:pPr>
-            <a:r>
-              <a:t>Write once, use everywhere</a:t>
-            </a:r>
-          </a:p>
-          <a:p>
-            <a:pPr>
-              <a:spcAft>
-                <a:spcPts val="800"/>
-              </a:spcAft>
-              <a:defRPr sz="2000" b="1">
-                <a:solidFill>
-                  <a:srgbClr val="333333"/>
-                </a:solidFill>
-              </a:defRPr>
-            </a:pPr>
-            <a:r>
-              <a:t>✓ Organized</a:t>
-            </a:r>
-          </a:p>
-          <a:p>
-            <a:pPr>
-              <a:spcAft>
-                <a:spcPts val="800"/>
-              </a:spcAft>
-              <a:defRPr sz="2000" b="1">
-                <a:solidFill>
-                  <a:srgbClr val="333333"/>
-                </a:solidFill>
-              </a:defRPr>
-            </a:pPr>
-            <a:r>
-              <a:t>Break complex tasks into pieces</a:t>
-            </a:r>
-          </a:p>
-          <a:p>
-            <a:pPr>
-              <a:spcAft>
-                <a:spcPts val="800"/>
-              </a:spcAft>
-              <a:defRPr sz="2000" b="1">
-                <a:solidFill>
-                  <a:srgbClr val="333333"/>
-                </a:solidFill>
-              </a:defRPr>
-            </a:pPr>
-            <a:r>
-              <a:t>✓ Testable</a:t>
-            </a:r>
-          </a:p>
-          <a:p>
-            <a:pPr>
-              <a:spcAft>
-                <a:spcPts val="800"/>
-              </a:spcAft>
-              <a:defRPr sz="2000" b="1">
-                <a:solidFill>
-                  <a:srgbClr val="333333"/>
-                </a:solidFill>
-              </a:defRPr>
-            </a:pPr>
-            <a:r>
-              <a:t>Easy to test and debug</a:t>
-            </a:r>
-          </a:p>
-          <a:p>
-            <a:pPr>
-              <a:spcAft>
-                <a:spcPts val="800"/>
-              </a:spcAft>
-              <a:defRPr sz="2000" b="1">
-                <a:solidFill>
-                  <a:srgbClr val="333333"/>
-                </a:solidFill>
-              </a:defRPr>
-            </a:pPr>
-            <a:r>
-              <a:t>✓ Maintainable</a:t>
-            </a:r>
-          </a:p>
-          <a:p>
-            <a:pPr>
-              <a:spcAft>
-                <a:spcPts val="800"/>
-              </a:spcAft>
-              <a:defRPr sz="2000" b="1">
-                <a:solidFill>
-                  <a:srgbClr val="333333"/>
-                </a:solidFill>
-              </a:defRPr>
-            </a:pPr>
-            <a:r>
-              <a:t>Update in one place</a:t>
-            </a:r>
-          </a:p>
-          <a:p>
-            <a:pPr>
-              <a:spcAft>
-                <a:spcPts val="800"/>
-              </a:spcAft>
-              <a:defRPr sz="2000" b="1">
-                <a:solidFill>
-                  <a:srgbClr val="333333"/>
-                </a:solidFill>
-              </a:defRPr>
-            </a:pPr>
-            <a:r>
-              <a:t>Functions are the building blocks of larger programs!</a:t>
-            </a:r>
-          </a:p>
-          <a:p>
-            <a:pPr>
-              <a:spcAft>
-                <a:spcPts val="800"/>
-              </a:spcAft>
-              <a:defRPr sz="2000" b="1">
-                <a:solidFill>
-                  <a:srgbClr val="333333"/>
-                </a:solidFill>
-              </a:defRPr>
-            </a:pPr>
-            <a:r>
-              <a:t>Master functions, and you'll write cleaner, more professional code</a:t>
+                <a:spcPts val="600"/>
+              </a:spcAft>
+              <a:defRPr b="1" sz="2000">
+                <a:solidFill>
+                  <a:srgbClr val="333333"/>
+                </a:solidFill>
+              </a:defRPr>
+            </a:pPr>
+            <a:r>
+              <a:t>Benefits:</a:t>
+            </a:r>
+          </a:p>
+          <a:p>
+            <a:pPr lvl="1">
+              <a:spcAft>
+                <a:spcPts val="400"/>
+              </a:spcAft>
+              <a:defRPr sz="1600">
+                <a:solidFill>
+                  <a:srgbClr val="333333"/>
+                </a:solidFill>
+              </a:defRPr>
+            </a:pPr>
+            <a:r>
+              <a:t>• Avoid code duplication (DRY)</a:t>
+            </a:r>
+          </a:p>
+          <a:p>
+            <a:pPr lvl="1">
+              <a:spcAft>
+                <a:spcPts val="400"/>
+              </a:spcAft>
+              <a:defRPr sz="1600">
+                <a:solidFill>
+                  <a:srgbClr val="333333"/>
+                </a:solidFill>
+              </a:defRPr>
+            </a:pPr>
+            <a:r>
+              <a:t>• Break down complex problems</a:t>
+            </a:r>
+          </a:p>
+          <a:p>
+            <a:pPr lvl="1">
+              <a:spcAft>
+                <a:spcPts val="400"/>
+              </a:spcAft>
+              <a:defRPr sz="1600">
+                <a:solidFill>
+                  <a:srgbClr val="333333"/>
+                </a:solidFill>
+              </a:defRPr>
+            </a:pPr>
+            <a:r>
+              <a:t>• Make code reusable</a:t>
+            </a:r>
+          </a:p>
+          <a:p>
+            <a:pPr lvl="1">
+              <a:spcAft>
+                <a:spcPts val="400"/>
+              </a:spcAft>
+              <a:defRPr sz="1600">
+                <a:solidFill>
+                  <a:srgbClr val="333333"/>
+                </a:solidFill>
+              </a:defRPr>
+            </a:pPr>
+            <a:r>
+              <a:t>• Easier to test and debug</a:t>
+            </a:r>
+          </a:p>
+          <a:p>
+            <a:pPr lvl="1">
+              <a:spcAft>
+                <a:spcPts val="400"/>
+              </a:spcAft>
+              <a:defRPr sz="1600">
+                <a:solidFill>
+                  <a:srgbClr val="333333"/>
+                </a:solidFill>
+              </a:defRPr>
+            </a:pPr>
+            <a:r>
+              <a:t>• Improve readability</a:t>
+            </a:r>
+          </a:p>
+          <a:p>
+            <a:pPr>
+              <a:spcAft>
+                <a:spcPts val="600"/>
+              </a:spcAft>
+              <a:defRPr b="1" sz="2000">
+                <a:solidFill>
+                  <a:srgbClr val="333333"/>
+                </a:solidFill>
+              </a:defRPr>
+            </a:pPr>
+            <a:r>
+              <a:t>Function Concept:</a:t>
+            </a:r>
+          </a:p>
+          <a:p>
+            <a:pPr lvl="1">
+              <a:spcAft>
+                <a:spcPts val="400"/>
+              </a:spcAft>
+              <a:defRPr sz="1600">
+                <a:solidFill>
+                  <a:srgbClr val="333333"/>
+                </a:solidFill>
+              </a:defRPr>
+            </a:pPr>
+            <a:r>
+              <a:t>• Input (parameters)</a:t>
+            </a:r>
+          </a:p>
+          <a:p>
+            <a:pPr lvl="1">
+              <a:spcAft>
+                <a:spcPts val="400"/>
+              </a:spcAft>
+              <a:defRPr sz="1600">
+                <a:solidFill>
+                  <a:srgbClr val="333333"/>
+                </a:solidFill>
+              </a:defRPr>
+            </a:pPr>
+            <a:r>
+              <a:t>• Processing (function body)</a:t>
+            </a:r>
+          </a:p>
+          <a:p>
+            <a:pPr lvl="1">
+              <a:spcAft>
+                <a:spcPts val="400"/>
+              </a:spcAft>
+              <a:defRPr sz="1600">
+                <a:solidFill>
+                  <a:srgbClr val="333333"/>
+                </a:solidFill>
+              </a:defRPr>
+            </a:pPr>
+            <a:r>
+              <a:t>• Output (return value)</a:t>
+            </a:r>
+          </a:p>
+          <a:p>
+            <a:pPr>
+              <a:spcAft>
+                <a:spcPts val="600"/>
+              </a:spcAft>
+              <a:defRPr b="1" sz="2000">
+                <a:solidFill>
+                  <a:srgbClr val="333333"/>
+                </a:solidFill>
+              </a:defRPr>
+            </a:pPr>
+            <a:r>
+              <a:t>Real-World Analogy:</a:t>
+            </a:r>
+          </a:p>
+          <a:p>
+            <a:pPr lvl="1">
+              <a:spcAft>
+                <a:spcPts val="400"/>
+              </a:spcAft>
+              <a:defRPr sz="1600">
+                <a:solidFill>
+                  <a:srgbClr val="333333"/>
+                </a:solidFill>
+              </a:defRPr>
+            </a:pPr>
+            <a:r>
+              <a:t>• Like a recipe: ingredients → steps → dish</a:t>
+            </a:r>
+          </a:p>
+          <a:p>
+            <a:pPr lvl="1">
+              <a:spcAft>
+                <a:spcPts val="400"/>
+              </a:spcAft>
+              <a:defRPr sz="1600">
+                <a:solidFill>
+                  <a:srgbClr val="333333"/>
+                </a:solidFill>
+              </a:defRPr>
+            </a:pPr>
+            <a:r>
+              <a:t>• Like a machine: input → process → output</a:t>
             </a:r>
           </a:p>
         </p:txBody>
@@ -4096,173 +4455,7 @@
 </p:sld>
 </file>
 
-<file path=ppt/slides/slide13.xml><?xml version="1.0" encoding="utf-8"?>
-<p:sld xmlns:a="http://schemas.openxmlformats.org/drawingml/2006/main" xmlns:p="http://schemas.openxmlformats.org/presentationml/2006/main" xmlns:r="http://schemas.openxmlformats.org/officeDocument/2006/relationships">
-  <p:cSld>
-    <p:spTree>
-      <p:nvGrpSpPr>
-        <p:cNvPr id="1" name=""/>
-        <p:cNvGrpSpPr/>
-        <p:nvPr/>
-      </p:nvGrpSpPr>
-      <p:grpSpPr/>
-      <p:sp>
-        <p:nvSpPr>
-          <p:cNvPr id="2" name="Rectangle 1"/>
-          <p:cNvSpPr/>
-          <p:nvPr/>
-        </p:nvSpPr>
-        <p:spPr>
-          <a:xfrm>
-            <a:off x="0" y="0"/>
-            <a:ext cx="12191695" cy="6858000"/>
-          </a:xfrm>
-          <a:prstGeom prst="rect">
-            <a:avLst/>
-          </a:prstGeom>
-          <a:solidFill>
-            <a:srgbClr val="F0F8FF"/>
-          </a:solidFill>
-          <a:ln>
-            <a:noFill/>
-          </a:ln>
-        </p:spPr>
-        <p:style>
-          <a:lnRef idx="1">
-            <a:schemeClr val="accent1"/>
-          </a:lnRef>
-          <a:fillRef idx="3">
-            <a:schemeClr val="accent1"/>
-          </a:fillRef>
-          <a:effectRef idx="2">
-            <a:schemeClr val="accent1"/>
-          </a:effectRef>
-          <a:fontRef idx="minor">
-            <a:schemeClr val="lt1"/>
-          </a:fontRef>
-        </p:style>
-        <p:txBody>
-          <a:bodyPr rtlCol="0" anchor="ctr"/>
-          <a:lstStyle/>
-          <a:p>
-            <a:pPr algn="ctr"/>
-          </a:p>
-        </p:txBody>
-      </p:sp>
-      <p:sp>
-        <p:nvSpPr>
-          <p:cNvPr id="3" name="TextBox 2"/>
-          <p:cNvSpPr txBox="1"/>
-          <p:nvPr/>
-        </p:nvSpPr>
-        <p:spPr>
-          <a:xfrm>
-            <a:off x="914400" y="1828800"/>
-            <a:ext cx="10360152" cy="1371600"/>
-          </a:xfrm>
-          <a:prstGeom prst="rect">
-            <a:avLst/>
-          </a:prstGeom>
-          <a:noFill/>
-        </p:spPr>
-        <p:txBody>
-          <a:bodyPr wrap="none">
-            <a:spAutoFit/>
-          </a:bodyPr>
-          <a:lstStyle/>
-          <a:p>
-            <a:pPr algn="ctr">
-              <a:defRPr sz="5400" b="1">
-                <a:solidFill>
-                  <a:srgbClr val="003366"/>
-                </a:solidFill>
-              </a:defRPr>
-            </a:pPr>
-            <a:r>
-              <a:t>Ready to Code!</a:t>
-            </a:r>
-          </a:p>
-        </p:txBody>
-      </p:sp>
-      <p:sp>
-        <p:nvSpPr>
-          <p:cNvPr id="4" name="TextBox 3"/>
-          <p:cNvSpPr txBox="1"/>
-          <p:nvPr/>
-        </p:nvSpPr>
-        <p:spPr>
-          <a:xfrm>
-            <a:off x="914400" y="3657600"/>
-            <a:ext cx="10360152" cy="548640"/>
-          </a:xfrm>
-          <a:prstGeom prst="rect">
-            <a:avLst/>
-          </a:prstGeom>
-          <a:noFill/>
-        </p:spPr>
-        <p:txBody>
-          <a:bodyPr wrap="none">
-            <a:spAutoFit/>
-          </a:bodyPr>
-          <a:lstStyle/>
-          <a:p>
-            <a:pPr algn="ctr">
-              <a:defRPr sz="2800">
-                <a:solidFill>
-                  <a:srgbClr val="4682B4"/>
-                </a:solidFill>
-              </a:defRPr>
-            </a:pPr>
-            <a:r>
-              <a:t>Open the practice notebook and start creating functions</a:t>
-            </a:r>
-          </a:p>
-        </p:txBody>
-      </p:sp>
-      <p:sp>
-        <p:nvSpPr>
-          <p:cNvPr id="5" name="TextBox 4"/>
-          <p:cNvSpPr txBox="1"/>
-          <p:nvPr/>
-        </p:nvSpPr>
-        <p:spPr>
-          <a:xfrm>
-            <a:off x="914400" y="4297680"/>
-            <a:ext cx="10360152" cy="548640"/>
-          </a:xfrm>
-          <a:prstGeom prst="rect">
-            <a:avLst/>
-          </a:prstGeom>
-          <a:noFill/>
-        </p:spPr>
-        <p:txBody>
-          <a:bodyPr wrap="none">
-            <a:spAutoFit/>
-          </a:bodyPr>
-          <a:lstStyle/>
-          <a:p>
-            <a:pPr algn="ctr">
-              <a:defRPr sz="2800">
-                <a:solidFill>
-                  <a:srgbClr val="4682B4"/>
-                </a:solidFill>
-              </a:defRPr>
-            </a:pPr>
-            <a:r>
-              <a:t>Remember: Functions make your code reusable and clean!</a:t>
-            </a:r>
-          </a:p>
-        </p:txBody>
-      </p:sp>
-    </p:spTree>
-  </p:cSld>
-  <p:clrMapOvr>
-    <a:masterClrMapping/>
-  </p:clrMapOvr>
-</p:sld>
-</file>
-
-<file path=ppt/slides/slide2.xml><?xml version="1.0" encoding="utf-8"?>
+<file path=ppt/slides/slide3.xml><?xml version="1.0" encoding="utf-8"?>
 <p:sld xmlns:a="http://schemas.openxmlformats.org/drawingml/2006/main" xmlns:p="http://schemas.openxmlformats.org/presentationml/2006/main" xmlns:r="http://schemas.openxmlformats.org/officeDocument/2006/relationships">
   <p:cSld>
     <p:spTree>
@@ -4366,8 +4559,8 @@
         </p:nvSpPr>
         <p:spPr>
           <a:xfrm>
-            <a:off x="457200" y="365760"/>
-            <a:ext cx="10972800" cy="731520"/>
+            <a:off x="457200" y="320040"/>
+            <a:ext cx="10972800" cy="640080"/>
           </a:xfrm>
           <a:prstGeom prst="rect">
             <a:avLst/>
@@ -4381,71 +4574,28 @@
           <a:lstStyle/>
           <a:p>
             <a:pPr>
-              <a:defRPr sz="4000" b="1">
+              <a:defRPr sz="3600" b="1">
                 <a:solidFill>
                   <a:srgbClr val="003366"/>
                 </a:solidFill>
               </a:defRPr>
             </a:pPr>
             <a:r>
-              <a:t>Why Do We Need Functions? 🤔</a:t>
-            </a:r>
-          </a:p>
-        </p:txBody>
-      </p:sp>
-      <p:sp>
-        <p:nvSpPr>
-          <p:cNvPr id="5" name="Rectangle 4"/>
-          <p:cNvSpPr/>
+              <a:t>Defining Functions</a:t>
+            </a:r>
+          </a:p>
+        </p:txBody>
+      </p:sp>
+      <p:sp>
+        <p:nvSpPr>
+          <p:cNvPr id="5" name="TextBox 4"/>
+          <p:cNvSpPr txBox="1"/>
           <p:nvPr/>
         </p:nvSpPr>
         <p:spPr>
           <a:xfrm>
-            <a:off x="457200" y="1005840"/>
-            <a:ext cx="1828800" cy="45720"/>
-          </a:xfrm>
-          <a:prstGeom prst="rect">
-            <a:avLst/>
-          </a:prstGeom>
-          <a:solidFill>
-            <a:srgbClr val="0066CC"/>
-          </a:solidFill>
-          <a:ln>
-            <a:noFill/>
-          </a:ln>
-        </p:spPr>
-        <p:style>
-          <a:lnRef idx="1">
-            <a:schemeClr val="accent1"/>
-          </a:lnRef>
-          <a:fillRef idx="3">
-            <a:schemeClr val="accent1"/>
-          </a:fillRef>
-          <a:effectRef idx="2">
-            <a:schemeClr val="accent1"/>
-          </a:effectRef>
-          <a:fontRef idx="minor">
-            <a:schemeClr val="lt1"/>
-          </a:fontRef>
-        </p:style>
-        <p:txBody>
-          <a:bodyPr rtlCol="0" anchor="ctr"/>
-          <a:lstStyle/>
-          <a:p>
-            <a:pPr algn="ctr"/>
-          </a:p>
-        </p:txBody>
-      </p:sp>
-      <p:sp>
-        <p:nvSpPr>
-          <p:cNvPr id="6" name="TextBox 5"/>
-          <p:cNvSpPr txBox="1"/>
-          <p:nvPr/>
-        </p:nvSpPr>
-        <p:spPr>
-          <a:xfrm>
-            <a:off x="640080" y="1371600"/>
-            <a:ext cx="10789920" cy="4572000"/>
+            <a:off x="640080" y="1188720"/>
+            <a:ext cx="10789920" cy="5303520"/>
           </a:xfrm>
           <a:prstGeom prst="rect">
             <a:avLst/>
@@ -4460,136 +4610,226 @@
           <a:p>
             <a:pPr>
               <a:spcAft>
-                <a:spcPts val="800"/>
-              </a:spcAft>
-              <a:defRPr sz="2000" b="1">
-                <a:solidFill>
-                  <a:srgbClr val="333333"/>
-                </a:solidFill>
-              </a:defRPr>
-            </a:pPr>
-            <a:r>
-              <a:t>Avoid Repetition</a:t>
-            </a:r>
-          </a:p>
-          <a:p>
-            <a:pPr>
-              <a:spcAft>
-                <a:spcPts val="800"/>
-              </a:spcAft>
-              <a:defRPr sz="2000" b="1">
-                <a:solidFill>
-                  <a:srgbClr val="333333"/>
-                </a:solidFill>
-              </a:defRPr>
-            </a:pPr>
-            <a:r>
-              <a:t>Write code once, use it many times (DRY: Don't Repeat Yourself)</a:t>
-            </a:r>
-          </a:p>
-          <a:p>
-            <a:pPr>
-              <a:spcAft>
-                <a:spcPts val="800"/>
-              </a:spcAft>
-              <a:defRPr sz="2000" b="1">
-                <a:solidFill>
-                  <a:srgbClr val="333333"/>
-                </a:solidFill>
-              </a:defRPr>
-            </a:pPr>
-            <a:r>
-              <a:t>Organization</a:t>
-            </a:r>
-          </a:p>
-          <a:p>
-            <a:pPr>
-              <a:spcAft>
-                <a:spcPts val="800"/>
-              </a:spcAft>
-              <a:defRPr sz="2000" b="1">
-                <a:solidFill>
-                  <a:srgbClr val="333333"/>
-                </a:solidFill>
-              </a:defRPr>
-            </a:pPr>
-            <a:r>
-              <a:t>Break complex problems into smaller, manageable pieces</a:t>
-            </a:r>
-          </a:p>
-          <a:p>
-            <a:pPr>
-              <a:spcAft>
-                <a:spcPts val="800"/>
-              </a:spcAft>
-              <a:defRPr sz="2000" b="1">
-                <a:solidFill>
-                  <a:srgbClr val="333333"/>
-                </a:solidFill>
-              </a:defRPr>
-            </a:pPr>
-            <a:r>
-              <a:t>Reusability</a:t>
-            </a:r>
-          </a:p>
-          <a:p>
-            <a:pPr>
-              <a:spcAft>
-                <a:spcPts val="800"/>
-              </a:spcAft>
-              <a:defRPr sz="2000" b="1">
-                <a:solidFill>
-                  <a:srgbClr val="333333"/>
-                </a:solidFill>
-              </a:defRPr>
-            </a:pPr>
-            <a:r>
-              <a:t>Use the same code in different parts of your program</a:t>
-            </a:r>
-          </a:p>
-          <a:p>
-            <a:pPr>
-              <a:spcAft>
-                <a:spcPts val="800"/>
-              </a:spcAft>
-              <a:defRPr sz="2000" b="1">
-                <a:solidFill>
-                  <a:srgbClr val="333333"/>
-                </a:solidFill>
-              </a:defRPr>
-            </a:pPr>
-            <a:r>
-              <a:t>Testing</a:t>
-            </a:r>
-          </a:p>
-          <a:p>
-            <a:pPr>
-              <a:spcAft>
-                <a:spcPts val="800"/>
-              </a:spcAft>
-              <a:defRPr sz="2000" b="1">
-                <a:solidFill>
-                  <a:srgbClr val="333333"/>
-                </a:solidFill>
-              </a:defRPr>
-            </a:pPr>
-            <a:r>
-              <a:t>Easier to test and debug small, focused pieces of code</a:t>
-            </a:r>
-          </a:p>
-          <a:p>
-            <a:pPr>
-              <a:spcAft>
-                <a:spcPts val="800"/>
-              </a:spcAft>
-              <a:defRPr sz="2000" b="1">
-                <a:solidFill>
-                  <a:srgbClr val="333333"/>
-                </a:solidFill>
-              </a:defRPr>
-            </a:pPr>
-            <a:r>
-              <a:t>DRY Principle:Don't Repeat Yourself - write code once and reuse it!</a:t>
+                <a:spcPts val="600"/>
+              </a:spcAft>
+              <a:defRPr b="1" sz="2000">
+                <a:solidFill>
+                  <a:srgbClr val="333333"/>
+                </a:solidFill>
+              </a:defRPr>
+            </a:pPr>
+            <a:r>
+              <a:t>Basic Syntax:</a:t>
+            </a:r>
+          </a:p>
+          <a:p>
+            <a:pPr>
+              <a:spcAft>
+                <a:spcPts val="600"/>
+              </a:spcAft>
+              <a:defRPr b="1" sz="2000">
+                <a:solidFill>
+                  <a:srgbClr val="333333"/>
+                </a:solidFill>
+              </a:defRPr>
+            </a:pPr>
+            <a:r>
+              <a:t>def function_name(parameters):</a:t>
+            </a:r>
+          </a:p>
+          <a:p>
+            <a:pPr>
+              <a:spcAft>
+                <a:spcPts val="600"/>
+              </a:spcAft>
+              <a:defRPr sz="1600">
+                <a:solidFill>
+                  <a:srgbClr val="333333"/>
+                </a:solidFill>
+              </a:defRPr>
+            </a:pPr>
+            <a:r>
+              <a:t>    # function body</a:t>
+            </a:r>
+          </a:p>
+          <a:p>
+            <a:pPr>
+              <a:spcAft>
+                <a:spcPts val="600"/>
+              </a:spcAft>
+              <a:defRPr sz="1600">
+                <a:solidFill>
+                  <a:srgbClr val="333333"/>
+                </a:solidFill>
+              </a:defRPr>
+            </a:pPr>
+            <a:r>
+              <a:t>    return value</a:t>
+            </a:r>
+          </a:p>
+          <a:p>
+            <a:pPr>
+              <a:spcAft>
+                <a:spcPts val="600"/>
+              </a:spcAft>
+              <a:defRPr b="1" sz="2000">
+                <a:solidFill>
+                  <a:srgbClr val="333333"/>
+                </a:solidFill>
+              </a:defRPr>
+            </a:pPr>
+            <a:r>
+              <a:t>Simple Example:</a:t>
+            </a:r>
+          </a:p>
+          <a:p>
+            <a:pPr>
+              <a:spcAft>
+                <a:spcPts val="600"/>
+              </a:spcAft>
+              <a:defRPr b="1" sz="2000">
+                <a:solidFill>
+                  <a:srgbClr val="333333"/>
+                </a:solidFill>
+              </a:defRPr>
+            </a:pPr>
+            <a:r>
+              <a:t>def greet(name):</a:t>
+            </a:r>
+          </a:p>
+          <a:p>
+            <a:pPr>
+              <a:spcAft>
+                <a:spcPts val="600"/>
+              </a:spcAft>
+              <a:defRPr sz="1600">
+                <a:solidFill>
+                  <a:srgbClr val="333333"/>
+                </a:solidFill>
+              </a:defRPr>
+            </a:pPr>
+            <a:r>
+              <a:t>    return f"Hello, {name}!"</a:t>
+            </a:r>
+          </a:p>
+          <a:p>
+            <a:pPr>
+              <a:spcAft>
+                <a:spcPts val="600"/>
+              </a:spcAft>
+              <a:defRPr sz="1600">
+                <a:solidFill>
+                  <a:srgbClr val="333333"/>
+                </a:solidFill>
+              </a:defRPr>
+            </a:pPr>
+            <a:r>
+              <a:t>result = greet("Alice")  # "Hello, Alice!"</a:t>
+            </a:r>
+          </a:p>
+          <a:p>
+            <a:pPr>
+              <a:spcAft>
+                <a:spcPts val="600"/>
+              </a:spcAft>
+              <a:defRPr b="1" sz="2000">
+                <a:solidFill>
+                  <a:srgbClr val="333333"/>
+                </a:solidFill>
+              </a:defRPr>
+            </a:pPr>
+            <a:r>
+              <a:t>Multiple Statements:</a:t>
+            </a:r>
+          </a:p>
+          <a:p>
+            <a:pPr>
+              <a:spcAft>
+                <a:spcPts val="600"/>
+              </a:spcAft>
+              <a:defRPr b="1" sz="2000">
+                <a:solidFill>
+                  <a:srgbClr val="333333"/>
+                </a:solidFill>
+              </a:defRPr>
+            </a:pPr>
+            <a:r>
+              <a:t>def calculate_area(length, width):</a:t>
+            </a:r>
+          </a:p>
+          <a:p>
+            <a:pPr>
+              <a:spcAft>
+                <a:spcPts val="600"/>
+              </a:spcAft>
+              <a:defRPr sz="1600">
+                <a:solidFill>
+                  <a:srgbClr val="333333"/>
+                </a:solidFill>
+              </a:defRPr>
+            </a:pPr>
+            <a:r>
+              <a:t>    area = length * width</a:t>
+            </a:r>
+          </a:p>
+          <a:p>
+            <a:pPr>
+              <a:spcAft>
+                <a:spcPts val="600"/>
+              </a:spcAft>
+              <a:defRPr sz="1600">
+                <a:solidFill>
+                  <a:srgbClr val="333333"/>
+                </a:solidFill>
+              </a:defRPr>
+            </a:pPr>
+            <a:r>
+              <a:t>    return area</a:t>
+            </a:r>
+          </a:p>
+          <a:p>
+            <a:pPr>
+              <a:spcAft>
+                <a:spcPts val="600"/>
+              </a:spcAft>
+              <a:defRPr b="1" sz="2000">
+                <a:solidFill>
+                  <a:srgbClr val="333333"/>
+                </a:solidFill>
+              </a:defRPr>
+            </a:pPr>
+            <a:r>
+              <a:t>No Return:</a:t>
+            </a:r>
+          </a:p>
+          <a:p>
+            <a:pPr>
+              <a:spcAft>
+                <a:spcPts val="600"/>
+              </a:spcAft>
+              <a:defRPr b="1" sz="2000">
+                <a:solidFill>
+                  <a:srgbClr val="333333"/>
+                </a:solidFill>
+              </a:defRPr>
+            </a:pPr>
+            <a:r>
+              <a:t>def print_message():</a:t>
+            </a:r>
+          </a:p>
+          <a:p>
+            <a:pPr>
+              <a:spcAft>
+                <a:spcPts val="600"/>
+              </a:spcAft>
+              <a:defRPr sz="1600">
+                <a:solidFill>
+                  <a:srgbClr val="333333"/>
+                </a:solidFill>
+              </a:defRPr>
+            </a:pPr>
+            <a:r>
+              <a:t>    print("Hello")  # Returns None</a:t>
             </a:r>
           </a:p>
         </p:txBody>
@@ -4602,7 +4842,7 @@
 </p:sld>
 </file>
 
-<file path=ppt/slides/slide3.xml><?xml version="1.0" encoding="utf-8"?>
+<file path=ppt/slides/slide4.xml><?xml version="1.0" encoding="utf-8"?>
 <p:sld xmlns:a="http://schemas.openxmlformats.org/drawingml/2006/main" xmlns:p="http://schemas.openxmlformats.org/presentationml/2006/main" xmlns:r="http://schemas.openxmlformats.org/officeDocument/2006/relationships">
   <p:cSld>
     <p:spTree>
@@ -4706,8 +4946,8 @@
         </p:nvSpPr>
         <p:spPr>
           <a:xfrm>
-            <a:off x="457200" y="365760"/>
-            <a:ext cx="10972800" cy="731520"/>
+            <a:off x="457200" y="320040"/>
+            <a:ext cx="10972800" cy="640080"/>
           </a:xfrm>
           <a:prstGeom prst="rect">
             <a:avLst/>
@@ -4721,71 +4961,28 @@
           <a:lstStyle/>
           <a:p>
             <a:pPr>
-              <a:defRPr sz="4000" b="1">
+              <a:defRPr sz="3600" b="1">
                 <a:solidFill>
                   <a:srgbClr val="003366"/>
                 </a:solidFill>
               </a:defRPr>
             </a:pPr>
             <a:r>
-              <a:t>Defining Functions ✨</a:t>
-            </a:r>
-          </a:p>
-        </p:txBody>
-      </p:sp>
-      <p:sp>
-        <p:nvSpPr>
-          <p:cNvPr id="5" name="Rectangle 4"/>
-          <p:cNvSpPr/>
+              <a:t>Parameters and Arguments</a:t>
+            </a:r>
+          </a:p>
+        </p:txBody>
+      </p:sp>
+      <p:sp>
+        <p:nvSpPr>
+          <p:cNvPr id="5" name="TextBox 4"/>
+          <p:cNvSpPr txBox="1"/>
           <p:nvPr/>
         </p:nvSpPr>
         <p:spPr>
           <a:xfrm>
-            <a:off x="457200" y="1005840"/>
-            <a:ext cx="1828800" cy="45720"/>
-          </a:xfrm>
-          <a:prstGeom prst="rect">
-            <a:avLst/>
-          </a:prstGeom>
-          <a:solidFill>
-            <a:srgbClr val="0066CC"/>
-          </a:solidFill>
-          <a:ln>
-            <a:noFill/>
-          </a:ln>
-        </p:spPr>
-        <p:style>
-          <a:lnRef idx="1">
-            <a:schemeClr val="accent1"/>
-          </a:lnRef>
-          <a:fillRef idx="3">
-            <a:schemeClr val="accent1"/>
-          </a:fillRef>
-          <a:effectRef idx="2">
-            <a:schemeClr val="accent1"/>
-          </a:effectRef>
-          <a:fontRef idx="minor">
-            <a:schemeClr val="lt1"/>
-          </a:fontRef>
-        </p:style>
-        <p:txBody>
-          <a:bodyPr rtlCol="0" anchor="ctr"/>
-          <a:lstStyle/>
-          <a:p>
-            <a:pPr algn="ctr"/>
-          </a:p>
-        </p:txBody>
-      </p:sp>
-      <p:sp>
-        <p:nvSpPr>
-          <p:cNvPr id="6" name="TextBox 5"/>
-          <p:cNvSpPr txBox="1"/>
-          <p:nvPr/>
-        </p:nvSpPr>
-        <p:spPr>
-          <a:xfrm>
-            <a:off x="640080" y="1371600"/>
-            <a:ext cx="10789920" cy="4572000"/>
+            <a:off x="640080" y="1188720"/>
+            <a:ext cx="10789920" cy="5303520"/>
           </a:xfrm>
           <a:prstGeom prst="rect">
             <a:avLst/>
@@ -4800,46 +4997,196 @@
           <a:p>
             <a:pPr>
               <a:spcAft>
-                <a:spcPts val="800"/>
-              </a:spcAft>
-              <a:defRPr sz="2000" b="1">
-                <a:solidFill>
-                  <a:srgbClr val="333333"/>
-                </a:solidFill>
-              </a:defRPr>
-            </a:pPr>
-            <a:r>
-              <a:t>Use thedefkeyword to create a function</a:t>
-            </a:r>
-          </a:p>
-          <a:p>
-            <a:pPr>
-              <a:spcAft>
-                <a:spcPts val="800"/>
-              </a:spcAft>
-              <a:defRPr sz="2000" b="1">
-                <a:solidFill>
-                  <a:srgbClr val="333333"/>
-                </a:solidFill>
-              </a:defRPr>
-            </a:pPr>
-            <a:r>
-              <a:t>Basic Syntax:</a:t>
-            </a:r>
-          </a:p>
-          <a:p>
-            <a:pPr>
-              <a:spcAft>
-                <a:spcPts val="800"/>
-              </a:spcAft>
-              <a:defRPr sz="2000" b="1">
-                <a:solidFill>
-                  <a:srgbClr val="333333"/>
-                </a:solidFill>
-              </a:defRPr>
-            </a:pPr>
-            <a:r>
-              <a:t>Simple Example:</a:t>
+                <a:spcPts val="600"/>
+              </a:spcAft>
+              <a:defRPr b="1" sz="2000">
+                <a:solidFill>
+                  <a:srgbClr val="333333"/>
+                </a:solidFill>
+              </a:defRPr>
+            </a:pPr>
+            <a:r>
+              <a:t>Terminology:</a:t>
+            </a:r>
+          </a:p>
+          <a:p>
+            <a:pPr lvl="1">
+              <a:spcAft>
+                <a:spcPts val="400"/>
+              </a:spcAft>
+              <a:defRPr sz="1600">
+                <a:solidFill>
+                  <a:srgbClr val="333333"/>
+                </a:solidFill>
+              </a:defRPr>
+            </a:pPr>
+            <a:r>
+              <a:t>• Parameters: Variables in definition</a:t>
+            </a:r>
+          </a:p>
+          <a:p>
+            <a:pPr lvl="1">
+              <a:spcAft>
+                <a:spcPts val="400"/>
+              </a:spcAft>
+              <a:defRPr sz="1600">
+                <a:solidFill>
+                  <a:srgbClr val="333333"/>
+                </a:solidFill>
+              </a:defRPr>
+            </a:pPr>
+            <a:r>
+              <a:t>• Arguments: Values passed when calling</a:t>
+            </a:r>
+          </a:p>
+          <a:p>
+            <a:pPr>
+              <a:spcAft>
+                <a:spcPts val="600"/>
+              </a:spcAft>
+              <a:defRPr b="1" sz="2000">
+                <a:solidFill>
+                  <a:srgbClr val="333333"/>
+                </a:solidFill>
+              </a:defRPr>
+            </a:pPr>
+            <a:r>
+              <a:t>def add(a, b):  # a, b are parameters</a:t>
+            </a:r>
+          </a:p>
+          <a:p>
+            <a:pPr>
+              <a:spcAft>
+                <a:spcPts val="600"/>
+              </a:spcAft>
+              <a:defRPr sz="1600">
+                <a:solidFill>
+                  <a:srgbClr val="333333"/>
+                </a:solidFill>
+              </a:defRPr>
+            </a:pPr>
+            <a:r>
+              <a:t>    return a + b</a:t>
+            </a:r>
+          </a:p>
+          <a:p>
+            <a:pPr>
+              <a:spcAft>
+                <a:spcPts val="600"/>
+              </a:spcAft>
+              <a:defRPr sz="1600">
+                <a:solidFill>
+                  <a:srgbClr val="333333"/>
+                </a:solidFill>
+              </a:defRPr>
+            </a:pPr>
+            <a:r>
+              <a:t>result = add(3, 5)  # 3, 5 are arguments</a:t>
+            </a:r>
+          </a:p>
+          <a:p>
+            <a:pPr>
+              <a:spcAft>
+                <a:spcPts val="600"/>
+              </a:spcAft>
+              <a:defRPr b="1" sz="2000">
+                <a:solidFill>
+                  <a:srgbClr val="333333"/>
+                </a:solidFill>
+              </a:defRPr>
+            </a:pPr>
+            <a:r>
+              <a:t>Types:</a:t>
+            </a:r>
+          </a:p>
+          <a:p>
+            <a:pPr lvl="1">
+              <a:spcAft>
+                <a:spcPts val="400"/>
+              </a:spcAft>
+              <a:defRPr sz="1600">
+                <a:solidFill>
+                  <a:srgbClr val="333333"/>
+                </a:solidFill>
+              </a:defRPr>
+            </a:pPr>
+            <a:r>
+              <a:t>• Positional: Order matters</a:t>
+            </a:r>
+          </a:p>
+          <a:p>
+            <a:pPr lvl="1">
+              <a:spcAft>
+                <a:spcPts val="400"/>
+              </a:spcAft>
+              <a:defRPr sz="1600">
+                <a:solidFill>
+                  <a:srgbClr val="333333"/>
+                </a:solidFill>
+              </a:defRPr>
+            </a:pPr>
+            <a:r>
+              <a:t>• Keyword: Name specified</a:t>
+            </a:r>
+          </a:p>
+          <a:p>
+            <a:pPr lvl="1">
+              <a:spcAft>
+                <a:spcPts val="400"/>
+              </a:spcAft>
+              <a:defRPr sz="1600">
+                <a:solidFill>
+                  <a:srgbClr val="333333"/>
+                </a:solidFill>
+              </a:defRPr>
+            </a:pPr>
+            <a:r>
+              <a:t>• Default: Optional with default value</a:t>
+            </a:r>
+          </a:p>
+          <a:p>
+            <a:pPr>
+              <a:spcAft>
+                <a:spcPts val="600"/>
+              </a:spcAft>
+              <a:defRPr sz="1600">
+                <a:solidFill>
+                  <a:srgbClr val="333333"/>
+                </a:solidFill>
+              </a:defRPr>
+            </a:pPr>
+            <a:r>
+              <a:t>add(3, 5)  # Positional</a:t>
+            </a:r>
+          </a:p>
+          <a:p>
+            <a:pPr>
+              <a:spcAft>
+                <a:spcPts val="600"/>
+              </a:spcAft>
+              <a:defRPr sz="1600">
+                <a:solidFill>
+                  <a:srgbClr val="333333"/>
+                </a:solidFill>
+              </a:defRPr>
+            </a:pPr>
+            <a:r>
+              <a:t>add(a=3, b=5)  # Keyword</a:t>
+            </a:r>
+          </a:p>
+          <a:p>
+            <a:pPr>
+              <a:spcAft>
+                <a:spcPts val="600"/>
+              </a:spcAft>
+              <a:defRPr sz="1600">
+                <a:solidFill>
+                  <a:srgbClr val="333333"/>
+                </a:solidFill>
+              </a:defRPr>
+            </a:pPr>
+            <a:r>
+              <a:t>add(b=5, a=3)  # Order doesn't matter</a:t>
             </a:r>
           </a:p>
         </p:txBody>
@@ -4852,7 +5199,7 @@
 </p:sld>
 </file>
 
-<file path=ppt/slides/slide4.xml><?xml version="1.0" encoding="utf-8"?>
+<file path=ppt/slides/slide5.xml><?xml version="1.0" encoding="utf-8"?>
 <p:sld xmlns:a="http://schemas.openxmlformats.org/drawingml/2006/main" xmlns:p="http://schemas.openxmlformats.org/presentationml/2006/main" xmlns:r="http://schemas.openxmlformats.org/officeDocument/2006/relationships">
   <p:cSld>
     <p:spTree>
@@ -4956,8 +5303,8 @@
         </p:nvSpPr>
         <p:spPr>
           <a:xfrm>
-            <a:off x="457200" y="365760"/>
-            <a:ext cx="10972800" cy="731520"/>
+            <a:off x="457200" y="320040"/>
+            <a:ext cx="10972800" cy="640080"/>
           </a:xfrm>
           <a:prstGeom prst="rect">
             <a:avLst/>
@@ -4971,71 +5318,28 @@
           <a:lstStyle/>
           <a:p>
             <a:pPr>
-              <a:defRPr sz="4000" b="1">
+              <a:defRPr sz="3600" b="1">
                 <a:solidFill>
                   <a:srgbClr val="003366"/>
                 </a:solidFill>
               </a:defRPr>
             </a:pPr>
             <a:r>
-              <a:t>Parameters and Arguments 📥</a:t>
-            </a:r>
-          </a:p>
-        </p:txBody>
-      </p:sp>
-      <p:sp>
-        <p:nvSpPr>
-          <p:cNvPr id="5" name="Rectangle 4"/>
-          <p:cNvSpPr/>
+              <a:t>Default Parameters</a:t>
+            </a:r>
+          </a:p>
+        </p:txBody>
+      </p:sp>
+      <p:sp>
+        <p:nvSpPr>
+          <p:cNvPr id="5" name="TextBox 4"/>
+          <p:cNvSpPr txBox="1"/>
           <p:nvPr/>
         </p:nvSpPr>
         <p:spPr>
           <a:xfrm>
-            <a:off x="457200" y="1005840"/>
-            <a:ext cx="1828800" cy="45720"/>
-          </a:xfrm>
-          <a:prstGeom prst="rect">
-            <a:avLst/>
-          </a:prstGeom>
-          <a:solidFill>
-            <a:srgbClr val="0066CC"/>
-          </a:solidFill>
-          <a:ln>
-            <a:noFill/>
-          </a:ln>
-        </p:spPr>
-        <p:style>
-          <a:lnRef idx="1">
-            <a:schemeClr val="accent1"/>
-          </a:lnRef>
-          <a:fillRef idx="3">
-            <a:schemeClr val="accent1"/>
-          </a:fillRef>
-          <a:effectRef idx="2">
-            <a:schemeClr val="accent1"/>
-          </a:effectRef>
-          <a:fontRef idx="minor">
-            <a:schemeClr val="lt1"/>
-          </a:fontRef>
-        </p:style>
-        <p:txBody>
-          <a:bodyPr rtlCol="0" anchor="ctr"/>
-          <a:lstStyle/>
-          <a:p>
-            <a:pPr algn="ctr"/>
-          </a:p>
-        </p:txBody>
-      </p:sp>
-      <p:sp>
-        <p:nvSpPr>
-          <p:cNvPr id="6" name="TextBox 5"/>
-          <p:cNvSpPr txBox="1"/>
-          <p:nvPr/>
-        </p:nvSpPr>
-        <p:spPr>
-          <a:xfrm>
-            <a:off x="640080" y="1371600"/>
-            <a:ext cx="10789920" cy="4572000"/>
+            <a:off x="640080" y="1188720"/>
+            <a:ext cx="10789920" cy="5303520"/>
           </a:xfrm>
           <a:prstGeom prst="rect">
             <a:avLst/>
@@ -5050,91 +5354,211 @@
           <a:p>
             <a:pPr>
               <a:spcAft>
-                <a:spcPts val="800"/>
-              </a:spcAft>
-              <a:defRPr sz="2000" b="1">
-                <a:solidFill>
-                  <a:srgbClr val="333333"/>
-                </a:solidFill>
-              </a:defRPr>
-            </a:pPr>
-            <a:r>
-              <a:t>Parameter</a:t>
-            </a:r>
-          </a:p>
-          <a:p>
-            <a:pPr>
-              <a:spcAft>
-                <a:spcPts val="800"/>
-              </a:spcAft>
-              <a:defRPr sz="2000" b="1">
-                <a:solidFill>
-                  <a:srgbClr val="333333"/>
-                </a:solidFill>
-              </a:defRPr>
-            </a:pPr>
-            <a:r>
-              <a:t>Variable in the function definition</a:t>
-            </a:r>
-          </a:p>
-          <a:p>
-            <a:pPr>
-              <a:spcAft>
-                <a:spcPts val="800"/>
-              </a:spcAft>
-              <a:defRPr sz="2000" b="1">
-                <a:solidFill>
-                  <a:srgbClr val="333333"/>
-                </a:solidFill>
-              </a:defRPr>
-            </a:pPr>
-            <a:r>
-              <a:t>Argument</a:t>
-            </a:r>
-          </a:p>
-          <a:p>
-            <a:pPr>
-              <a:spcAft>
-                <a:spcPts val="800"/>
-              </a:spcAft>
-              <a:defRPr sz="2000" b="1">
-                <a:solidFill>
-                  <a:srgbClr val="333333"/>
-                </a:solidFill>
-              </a:defRPr>
-            </a:pPr>
-            <a:r>
-              <a:t>Actual value passed when calling</a:t>
-            </a:r>
-          </a:p>
-          <a:p>
-            <a:pPr>
-              <a:spcAft>
-                <a:spcPts val="800"/>
-              </a:spcAft>
-              <a:defRPr sz="2000" b="1">
-                <a:solidFill>
-                  <a:srgbClr val="333333"/>
-                </a:solidFill>
-              </a:defRPr>
-            </a:pPr>
-            <a:r>
-              <a:t>Example:</a:t>
-            </a:r>
-          </a:p>
-          <a:p>
-            <a:pPr>
-              <a:spcAft>
-                <a:spcPts val="800"/>
-              </a:spcAft>
-              <a:defRPr sz="2000" b="1">
-                <a:solidFill>
-                  <a:srgbClr val="333333"/>
-                </a:solidFill>
-              </a:defRPr>
-            </a:pPr>
-            <a:r>
-              <a:t>Multiple Parameters:</a:t>
+                <a:spcPts val="600"/>
+              </a:spcAft>
+              <a:defRPr b="1" sz="2000">
+                <a:solidFill>
+                  <a:srgbClr val="333333"/>
+                </a:solidFill>
+              </a:defRPr>
+            </a:pPr>
+            <a:r>
+              <a:t>Syntax:</a:t>
+            </a:r>
+          </a:p>
+          <a:p>
+            <a:pPr>
+              <a:spcAft>
+                <a:spcPts val="600"/>
+              </a:spcAft>
+              <a:defRPr b="1" sz="2000">
+                <a:solidFill>
+                  <a:srgbClr val="333333"/>
+                </a:solidFill>
+              </a:defRPr>
+            </a:pPr>
+            <a:r>
+              <a:t>def greet(name, greeting="Hello"):</a:t>
+            </a:r>
+          </a:p>
+          <a:p>
+            <a:pPr>
+              <a:spcAft>
+                <a:spcPts val="600"/>
+              </a:spcAft>
+              <a:defRPr sz="1600">
+                <a:solidFill>
+                  <a:srgbClr val="333333"/>
+                </a:solidFill>
+              </a:defRPr>
+            </a:pPr>
+            <a:r>
+              <a:t>    return f"{greeting}, {name}!"</a:t>
+            </a:r>
+          </a:p>
+          <a:p>
+            <a:pPr>
+              <a:spcAft>
+                <a:spcPts val="600"/>
+              </a:spcAft>
+              <a:defRPr b="1" sz="2000">
+                <a:solidFill>
+                  <a:srgbClr val="333333"/>
+                </a:solidFill>
+              </a:defRPr>
+            </a:pPr>
+            <a:r>
+              <a:t>Calling:</a:t>
+            </a:r>
+          </a:p>
+          <a:p>
+            <a:pPr>
+              <a:spcAft>
+                <a:spcPts val="600"/>
+              </a:spcAft>
+              <a:defRPr sz="1600">
+                <a:solidFill>
+                  <a:srgbClr val="333333"/>
+                </a:solidFill>
+              </a:defRPr>
+            </a:pPr>
+            <a:r>
+              <a:t>greet("Alice")  # "Hello, Alice!"</a:t>
+            </a:r>
+          </a:p>
+          <a:p>
+            <a:pPr>
+              <a:spcAft>
+                <a:spcPts val="600"/>
+              </a:spcAft>
+              <a:defRPr sz="1600">
+                <a:solidFill>
+                  <a:srgbClr val="333333"/>
+                </a:solidFill>
+              </a:defRPr>
+            </a:pPr>
+            <a:r>
+              <a:t>greet("Bob", "Hi")  # "Hi, Bob!"</a:t>
+            </a:r>
+          </a:p>
+          <a:p>
+            <a:pPr>
+              <a:spcAft>
+                <a:spcPts val="600"/>
+              </a:spcAft>
+              <a:defRPr sz="1600">
+                <a:solidFill>
+                  <a:srgbClr val="333333"/>
+                </a:solidFill>
+              </a:defRPr>
+            </a:pPr>
+            <a:r>
+              <a:t>greet("Charlie", greeting="Hey")  # "Hey, Charlie!"</a:t>
+            </a:r>
+          </a:p>
+          <a:p>
+            <a:pPr>
+              <a:spcAft>
+                <a:spcPts val="600"/>
+              </a:spcAft>
+              <a:defRPr b="1" sz="2000">
+                <a:solidFill>
+                  <a:srgbClr val="333333"/>
+                </a:solidFill>
+              </a:defRPr>
+            </a:pPr>
+            <a:r>
+              <a:t>Rules:</a:t>
+            </a:r>
+          </a:p>
+          <a:p>
+            <a:pPr lvl="1">
+              <a:spcAft>
+                <a:spcPts val="400"/>
+              </a:spcAft>
+              <a:defRPr sz="1600">
+                <a:solidFill>
+                  <a:srgbClr val="333333"/>
+                </a:solidFill>
+              </a:defRPr>
+            </a:pPr>
+            <a:r>
+              <a:t>• Default parameters must come last</a:t>
+            </a:r>
+          </a:p>
+          <a:p>
+            <a:pPr lvl="1">
+              <a:spcAft>
+                <a:spcPts val="400"/>
+              </a:spcAft>
+              <a:defRPr sz="1600">
+                <a:solidFill>
+                  <a:srgbClr val="333333"/>
+                </a:solidFill>
+              </a:defRPr>
+            </a:pPr>
+            <a:r>
+              <a:t>• Evaluated once at definition time</a:t>
+            </a:r>
+          </a:p>
+          <a:p>
+            <a:pPr lvl="1">
+              <a:spcAft>
+                <a:spcPts val="400"/>
+              </a:spcAft>
+              <a:defRPr sz="1600">
+                <a:solidFill>
+                  <a:srgbClr val="333333"/>
+                </a:solidFill>
+              </a:defRPr>
+            </a:pPr>
+            <a:r>
+              <a:t>• Don't use mutable defaults</a:t>
+            </a:r>
+          </a:p>
+          <a:p>
+            <a:pPr>
+              <a:spcAft>
+                <a:spcPts val="600"/>
+              </a:spcAft>
+              <a:defRPr b="1" sz="2000">
+                <a:solidFill>
+                  <a:srgbClr val="333333"/>
+                </a:solidFill>
+              </a:defRPr>
+            </a:pPr>
+            <a:r>
+              <a:t>Common Pattern:</a:t>
+            </a:r>
+          </a:p>
+          <a:p>
+            <a:pPr>
+              <a:spcAft>
+                <a:spcPts val="600"/>
+              </a:spcAft>
+              <a:defRPr b="1" sz="2000">
+                <a:solidFill>
+                  <a:srgbClr val="333333"/>
+                </a:solidFill>
+              </a:defRPr>
+            </a:pPr>
+            <a:r>
+              <a:t>def print_list(items, sep=", "):</a:t>
+            </a:r>
+          </a:p>
+          <a:p>
+            <a:pPr>
+              <a:spcAft>
+                <a:spcPts val="600"/>
+              </a:spcAft>
+              <a:defRPr sz="1600">
+                <a:solidFill>
+                  <a:srgbClr val="333333"/>
+                </a:solidFill>
+              </a:defRPr>
+            </a:pPr>
+            <a:r>
+              <a:t>    print(sep.join(items))</a:t>
             </a:r>
           </a:p>
         </p:txBody>
@@ -5147,7 +5571,7 @@
 </p:sld>
 </file>
 
-<file path=ppt/slides/slide5.xml><?xml version="1.0" encoding="utf-8"?>
+<file path=ppt/slides/slide6.xml><?xml version="1.0" encoding="utf-8"?>
 <p:sld xmlns:a="http://schemas.openxmlformats.org/drawingml/2006/main" xmlns:p="http://schemas.openxmlformats.org/presentationml/2006/main" xmlns:r="http://schemas.openxmlformats.org/officeDocument/2006/relationships">
   <p:cSld>
     <p:spTree>
@@ -5251,8 +5675,8 @@
         </p:nvSpPr>
         <p:spPr>
           <a:xfrm>
-            <a:off x="457200" y="365760"/>
-            <a:ext cx="10972800" cy="731520"/>
+            <a:off x="457200" y="320040"/>
+            <a:ext cx="10972800" cy="640080"/>
           </a:xfrm>
           <a:prstGeom prst="rect">
             <a:avLst/>
@@ -5266,71 +5690,28 @@
           <a:lstStyle/>
           <a:p>
             <a:pPr>
-              <a:defRPr sz="4000" b="1">
+              <a:defRPr sz="3600" b="1">
                 <a:solidFill>
                   <a:srgbClr val="003366"/>
                 </a:solidFill>
               </a:defRPr>
             </a:pPr>
             <a:r>
-              <a:t>Return Values 📤</a:t>
-            </a:r>
-          </a:p>
-        </p:txBody>
-      </p:sp>
-      <p:sp>
-        <p:nvSpPr>
-          <p:cNvPr id="5" name="Rectangle 4"/>
-          <p:cNvSpPr/>
+              <a:t>Return Values</a:t>
+            </a:r>
+          </a:p>
+        </p:txBody>
+      </p:sp>
+      <p:sp>
+        <p:nvSpPr>
+          <p:cNvPr id="5" name="TextBox 4"/>
+          <p:cNvSpPr txBox="1"/>
           <p:nvPr/>
         </p:nvSpPr>
         <p:spPr>
           <a:xfrm>
-            <a:off x="457200" y="1005840"/>
-            <a:ext cx="1828800" cy="45720"/>
-          </a:xfrm>
-          <a:prstGeom prst="rect">
-            <a:avLst/>
-          </a:prstGeom>
-          <a:solidFill>
-            <a:srgbClr val="0066CC"/>
-          </a:solidFill>
-          <a:ln>
-            <a:noFill/>
-          </a:ln>
-        </p:spPr>
-        <p:style>
-          <a:lnRef idx="1">
-            <a:schemeClr val="accent1"/>
-          </a:lnRef>
-          <a:fillRef idx="3">
-            <a:schemeClr val="accent1"/>
-          </a:fillRef>
-          <a:effectRef idx="2">
-            <a:schemeClr val="accent1"/>
-          </a:effectRef>
-          <a:fontRef idx="minor">
-            <a:schemeClr val="lt1"/>
-          </a:fontRef>
-        </p:style>
-        <p:txBody>
-          <a:bodyPr rtlCol="0" anchor="ctr"/>
-          <a:lstStyle/>
-          <a:p>
-            <a:pPr algn="ctr"/>
-          </a:p>
-        </p:txBody>
-      </p:sp>
-      <p:sp>
-        <p:nvSpPr>
-          <p:cNvPr id="6" name="TextBox 5"/>
-          <p:cNvSpPr txBox="1"/>
-          <p:nvPr/>
-        </p:nvSpPr>
-        <p:spPr>
-          <a:xfrm>
-            <a:off x="640080" y="1371600"/>
-            <a:ext cx="10789920" cy="4572000"/>
+            <a:off x="640080" y="1188720"/>
+            <a:ext cx="10789920" cy="5303520"/>
           </a:xfrm>
           <a:prstGeom prst="rect">
             <a:avLst/>
@@ -5345,46 +5726,241 @@
           <a:p>
             <a:pPr>
               <a:spcAft>
-                <a:spcPts val="800"/>
-              </a:spcAft>
-              <a:defRPr sz="2000" b="1">
-                <a:solidFill>
-                  <a:srgbClr val="333333"/>
-                </a:solidFill>
-              </a:defRPr>
-            </a:pPr>
-            <a:r>
-              <a:t>Functions canreturnvalues back to the caller</a:t>
-            </a:r>
-          </a:p>
-          <a:p>
-            <a:pPr>
-              <a:spcAft>
-                <a:spcPts val="800"/>
-              </a:spcAft>
-              <a:defRPr sz="2000" b="1">
-                <a:solidFill>
-                  <a:srgbClr val="333333"/>
-                </a:solidFill>
-              </a:defRPr>
-            </a:pPr>
-            <a:r>
-              <a:t>Without Return:</a:t>
-            </a:r>
-          </a:p>
-          <a:p>
-            <a:pPr>
-              <a:spcAft>
-                <a:spcPts val="800"/>
-              </a:spcAft>
-              <a:defRPr sz="2000" b="1">
-                <a:solidFill>
-                  <a:srgbClr val="333333"/>
-                </a:solidFill>
-              </a:defRPr>
-            </a:pPr>
-            <a:r>
-              <a:t>With Return:</a:t>
+                <a:spcPts val="600"/>
+              </a:spcAft>
+              <a:defRPr b="1" sz="2000">
+                <a:solidFill>
+                  <a:srgbClr val="333333"/>
+                </a:solidFill>
+              </a:defRPr>
+            </a:pPr>
+            <a:r>
+              <a:t>Single Value:</a:t>
+            </a:r>
+          </a:p>
+          <a:p>
+            <a:pPr>
+              <a:spcAft>
+                <a:spcPts val="600"/>
+              </a:spcAft>
+              <a:defRPr b="1" sz="2000">
+                <a:solidFill>
+                  <a:srgbClr val="333333"/>
+                </a:solidFill>
+              </a:defRPr>
+            </a:pPr>
+            <a:r>
+              <a:t>def square(x):</a:t>
+            </a:r>
+          </a:p>
+          <a:p>
+            <a:pPr>
+              <a:spcAft>
+                <a:spcPts val="600"/>
+              </a:spcAft>
+              <a:defRPr sz="1600">
+                <a:solidFill>
+                  <a:srgbClr val="333333"/>
+                </a:solidFill>
+              </a:defRPr>
+            </a:pPr>
+            <a:r>
+              <a:t>    return x ** 2</a:t>
+            </a:r>
+          </a:p>
+          <a:p>
+            <a:pPr>
+              <a:spcAft>
+                <a:spcPts val="600"/>
+              </a:spcAft>
+              <a:defRPr b="1" sz="2000">
+                <a:solidFill>
+                  <a:srgbClr val="333333"/>
+                </a:solidFill>
+              </a:defRPr>
+            </a:pPr>
+            <a:r>
+              <a:t>Multiple Values (Tuple):</a:t>
+            </a:r>
+          </a:p>
+          <a:p>
+            <a:pPr>
+              <a:spcAft>
+                <a:spcPts val="600"/>
+              </a:spcAft>
+              <a:defRPr b="1" sz="2000">
+                <a:solidFill>
+                  <a:srgbClr val="333333"/>
+                </a:solidFill>
+              </a:defRPr>
+            </a:pPr>
+            <a:r>
+              <a:t>def get_stats(numbers):</a:t>
+            </a:r>
+          </a:p>
+          <a:p>
+            <a:pPr>
+              <a:spcAft>
+                <a:spcPts val="600"/>
+              </a:spcAft>
+              <a:defRPr sz="1600">
+                <a:solidFill>
+                  <a:srgbClr val="333333"/>
+                </a:solidFill>
+              </a:defRPr>
+            </a:pPr>
+            <a:r>
+              <a:t>    return min(numbers), max(numbers), sum(numbers)</a:t>
+            </a:r>
+          </a:p>
+          <a:p>
+            <a:pPr>
+              <a:spcAft>
+                <a:spcPts val="600"/>
+              </a:spcAft>
+              <a:defRPr sz="1600">
+                <a:solidFill>
+                  <a:srgbClr val="333333"/>
+                </a:solidFill>
+              </a:defRPr>
+            </a:pPr>
+            <a:r>
+              <a:t>min_val, max_val, total = get_stats([1, 2, 3, 4])</a:t>
+            </a:r>
+          </a:p>
+          <a:p>
+            <a:pPr>
+              <a:spcAft>
+                <a:spcPts val="600"/>
+              </a:spcAft>
+              <a:defRPr b="1" sz="2000">
+                <a:solidFill>
+                  <a:srgbClr val="333333"/>
+                </a:solidFill>
+              </a:defRPr>
+            </a:pPr>
+            <a:r>
+              <a:t>No Return (None):</a:t>
+            </a:r>
+          </a:p>
+          <a:p>
+            <a:pPr>
+              <a:spcAft>
+                <a:spcPts val="600"/>
+              </a:spcAft>
+              <a:defRPr b="1" sz="2000">
+                <a:solidFill>
+                  <a:srgbClr val="333333"/>
+                </a:solidFill>
+              </a:defRPr>
+            </a:pPr>
+            <a:r>
+              <a:t>def print_hello():</a:t>
+            </a:r>
+          </a:p>
+          <a:p>
+            <a:pPr>
+              <a:spcAft>
+                <a:spcPts val="600"/>
+              </a:spcAft>
+              <a:defRPr sz="1600">
+                <a:solidFill>
+                  <a:srgbClr val="333333"/>
+                </a:solidFill>
+              </a:defRPr>
+            </a:pPr>
+            <a:r>
+              <a:t>    print("Hello")</a:t>
+            </a:r>
+          </a:p>
+          <a:p>
+            <a:pPr>
+              <a:spcAft>
+                <a:spcPts val="600"/>
+              </a:spcAft>
+              <a:defRPr sz="1600">
+                <a:solidFill>
+                  <a:srgbClr val="333333"/>
+                </a:solidFill>
+              </a:defRPr>
+            </a:pPr>
+            <a:r>
+              <a:t>result = print_hello()  # None</a:t>
+            </a:r>
+          </a:p>
+          <a:p>
+            <a:pPr>
+              <a:spcAft>
+                <a:spcPts val="600"/>
+              </a:spcAft>
+              <a:defRPr b="1" sz="2000">
+                <a:solidFill>
+                  <a:srgbClr val="333333"/>
+                </a:solidFill>
+              </a:defRPr>
+            </a:pPr>
+            <a:r>
+              <a:t>Early Return:</a:t>
+            </a:r>
+          </a:p>
+          <a:p>
+            <a:pPr>
+              <a:spcAft>
+                <a:spcPts val="600"/>
+              </a:spcAft>
+              <a:defRPr b="1" sz="2000">
+                <a:solidFill>
+                  <a:srgbClr val="333333"/>
+                </a:solidFill>
+              </a:defRPr>
+            </a:pPr>
+            <a:r>
+              <a:t>def divide(a, b):</a:t>
+            </a:r>
+          </a:p>
+          <a:p>
+            <a:pPr>
+              <a:spcAft>
+                <a:spcPts val="600"/>
+              </a:spcAft>
+              <a:defRPr sz="1600">
+                <a:solidFill>
+                  <a:srgbClr val="333333"/>
+                </a:solidFill>
+              </a:defRPr>
+            </a:pPr>
+            <a:r>
+              <a:t>    if b == 0:</a:t>
+            </a:r>
+          </a:p>
+          <a:p>
+            <a:pPr>
+              <a:spcAft>
+                <a:spcPts val="600"/>
+              </a:spcAft>
+              <a:defRPr sz="1600">
+                <a:solidFill>
+                  <a:srgbClr val="333333"/>
+                </a:solidFill>
+              </a:defRPr>
+            </a:pPr>
+            <a:r>
+              <a:t>        return None</a:t>
+            </a:r>
+          </a:p>
+          <a:p>
+            <a:pPr>
+              <a:spcAft>
+                <a:spcPts val="600"/>
+              </a:spcAft>
+              <a:defRPr sz="1600">
+                <a:solidFill>
+                  <a:srgbClr val="333333"/>
+                </a:solidFill>
+              </a:defRPr>
+            </a:pPr>
+            <a:r>
+              <a:t>    return a / b</a:t>
             </a:r>
           </a:p>
         </p:txBody>
@@ -5397,7 +5973,7 @@
 </p:sld>
 </file>
 
-<file path=ppt/slides/slide6.xml><?xml version="1.0" encoding="utf-8"?>
+<file path=ppt/slides/slide7.xml><?xml version="1.0" encoding="utf-8"?>
 <p:sld xmlns:a="http://schemas.openxmlformats.org/drawingml/2006/main" xmlns:p="http://schemas.openxmlformats.org/presentationml/2006/main" xmlns:r="http://schemas.openxmlformats.org/officeDocument/2006/relationships">
   <p:cSld>
     <p:spTree>
@@ -5501,8 +6077,8 @@
         </p:nvSpPr>
         <p:spPr>
           <a:xfrm>
-            <a:off x="457200" y="365760"/>
-            <a:ext cx="10972800" cy="731520"/>
+            <a:off x="457200" y="320040"/>
+            <a:ext cx="10972800" cy="640080"/>
           </a:xfrm>
           <a:prstGeom prst="rect">
             <a:avLst/>
@@ -5516,71 +6092,28 @@
           <a:lstStyle/>
           <a:p>
             <a:pPr>
-              <a:defRPr sz="4000" b="1">
+              <a:defRPr sz="3600" b="1">
                 <a:solidFill>
                   <a:srgbClr val="003366"/>
                 </a:solidFill>
               </a:defRPr>
             </a:pPr>
             <a:r>
-              <a:t>Default Parameters 🎯</a:t>
-            </a:r>
-          </a:p>
-        </p:txBody>
-      </p:sp>
-      <p:sp>
-        <p:nvSpPr>
-          <p:cNvPr id="5" name="Rectangle 4"/>
-          <p:cNvSpPr/>
+              <a:t>Variable Scope</a:t>
+            </a:r>
+          </a:p>
+        </p:txBody>
+      </p:sp>
+      <p:sp>
+        <p:nvSpPr>
+          <p:cNvPr id="5" name="TextBox 4"/>
+          <p:cNvSpPr txBox="1"/>
           <p:nvPr/>
         </p:nvSpPr>
         <p:spPr>
           <a:xfrm>
-            <a:off x="457200" y="1005840"/>
-            <a:ext cx="1828800" cy="45720"/>
-          </a:xfrm>
-          <a:prstGeom prst="rect">
-            <a:avLst/>
-          </a:prstGeom>
-          <a:solidFill>
-            <a:srgbClr val="0066CC"/>
-          </a:solidFill>
-          <a:ln>
-            <a:noFill/>
-          </a:ln>
-        </p:spPr>
-        <p:style>
-          <a:lnRef idx="1">
-            <a:schemeClr val="accent1"/>
-          </a:lnRef>
-          <a:fillRef idx="3">
-            <a:schemeClr val="accent1"/>
-          </a:fillRef>
-          <a:effectRef idx="2">
-            <a:schemeClr val="accent1"/>
-          </a:effectRef>
-          <a:fontRef idx="minor">
-            <a:schemeClr val="lt1"/>
-          </a:fontRef>
-        </p:style>
-        <p:txBody>
-          <a:bodyPr rtlCol="0" anchor="ctr"/>
-          <a:lstStyle/>
-          <a:p>
-            <a:pPr algn="ctr"/>
-          </a:p>
-        </p:txBody>
-      </p:sp>
-      <p:sp>
-        <p:nvSpPr>
-          <p:cNvPr id="6" name="TextBox 5"/>
-          <p:cNvSpPr txBox="1"/>
-          <p:nvPr/>
-        </p:nvSpPr>
-        <p:spPr>
-          <a:xfrm>
-            <a:off x="640080" y="1371600"/>
-            <a:ext cx="10789920" cy="4572000"/>
+            <a:off x="640080" y="1188720"/>
+            <a:ext cx="10789920" cy="5303520"/>
           </a:xfrm>
           <a:prstGeom prst="rect">
             <a:avLst/>
@@ -5595,46 +6128,256 @@
           <a:p>
             <a:pPr>
               <a:spcAft>
-                <a:spcPts val="800"/>
-              </a:spcAft>
-              <a:defRPr sz="2000" b="1">
-                <a:solidFill>
-                  <a:srgbClr val="333333"/>
-                </a:solidFill>
-              </a:defRPr>
-            </a:pPr>
-            <a:r>
-              <a:t>Set default values for parameters - optional arguments!</a:t>
-            </a:r>
-          </a:p>
-          <a:p>
-            <a:pPr>
-              <a:spcAft>
-                <a:spcPts val="800"/>
-              </a:spcAft>
-              <a:defRPr sz="2000" b="1">
-                <a:solidFill>
-                  <a:srgbClr val="333333"/>
-                </a:solidFill>
-              </a:defRPr>
-            </a:pPr>
-            <a:r>
-              <a:t>Example:</a:t>
-            </a:r>
-          </a:p>
-          <a:p>
-            <a:pPr>
-              <a:spcAft>
-                <a:spcPts val="800"/>
-              </a:spcAft>
-              <a:defRPr sz="2000" b="1">
-                <a:solidFill>
-                  <a:srgbClr val="333333"/>
-                </a:solidFill>
-              </a:defRPr>
-            </a:pPr>
-            <a:r>
-              <a:t>Multiple Defaults:</a:t>
+                <a:spcPts val="600"/>
+              </a:spcAft>
+              <a:defRPr b="1" sz="2000">
+                <a:solidFill>
+                  <a:srgbClr val="333333"/>
+                </a:solidFill>
+              </a:defRPr>
+            </a:pPr>
+            <a:r>
+              <a:t>Local Scope:</a:t>
+            </a:r>
+          </a:p>
+          <a:p>
+            <a:pPr>
+              <a:spcAft>
+                <a:spcPts val="600"/>
+              </a:spcAft>
+              <a:defRPr b="1" sz="2000">
+                <a:solidFill>
+                  <a:srgbClr val="333333"/>
+                </a:solidFill>
+              </a:defRPr>
+            </a:pPr>
+            <a:r>
+              <a:t>def my_func():</a:t>
+            </a:r>
+          </a:p>
+          <a:p>
+            <a:pPr>
+              <a:spcAft>
+                <a:spcPts val="600"/>
+              </a:spcAft>
+              <a:defRPr sz="1600">
+                <a:solidFill>
+                  <a:srgbClr val="333333"/>
+                </a:solidFill>
+              </a:defRPr>
+            </a:pPr>
+            <a:r>
+              <a:t>    local_var = 10  # Only exists in function</a:t>
+            </a:r>
+          </a:p>
+          <a:p>
+            <a:pPr>
+              <a:spcAft>
+                <a:spcPts val="600"/>
+              </a:spcAft>
+              <a:defRPr sz="1600">
+                <a:solidFill>
+                  <a:srgbClr val="333333"/>
+                </a:solidFill>
+              </a:defRPr>
+            </a:pPr>
+            <a:r>
+              <a:t>    print(local_var)</a:t>
+            </a:r>
+          </a:p>
+          <a:p>
+            <a:pPr>
+              <a:spcAft>
+                <a:spcPts val="600"/>
+              </a:spcAft>
+              <a:defRPr b="1" sz="2000">
+                <a:solidFill>
+                  <a:srgbClr val="333333"/>
+                </a:solidFill>
+              </a:defRPr>
+            </a:pPr>
+            <a:r>
+              <a:t>Global Scope:</a:t>
+            </a:r>
+          </a:p>
+          <a:p>
+            <a:pPr>
+              <a:spcAft>
+                <a:spcPts val="600"/>
+              </a:spcAft>
+              <a:defRPr sz="1600">
+                <a:solidFill>
+                  <a:srgbClr val="333333"/>
+                </a:solidFill>
+              </a:defRPr>
+            </a:pPr>
+            <a:r>
+              <a:t>global_var = 20  # Exists everywhere</a:t>
+            </a:r>
+          </a:p>
+          <a:p>
+            <a:pPr>
+              <a:spcAft>
+                <a:spcPts val="600"/>
+              </a:spcAft>
+              <a:defRPr b="1" sz="2000">
+                <a:solidFill>
+                  <a:srgbClr val="333333"/>
+                </a:solidFill>
+              </a:defRPr>
+            </a:pPr>
+            <a:r>
+              <a:t>def my_func():</a:t>
+            </a:r>
+          </a:p>
+          <a:p>
+            <a:pPr>
+              <a:spcAft>
+                <a:spcPts val="600"/>
+              </a:spcAft>
+              <a:defRPr sz="1600">
+                <a:solidFill>
+                  <a:srgbClr val="333333"/>
+                </a:solidFill>
+              </a:defRPr>
+            </a:pPr>
+            <a:r>
+              <a:t>    print(global_var)  # Can read global</a:t>
+            </a:r>
+          </a:p>
+          <a:p>
+            <a:pPr>
+              <a:spcAft>
+                <a:spcPts val="600"/>
+              </a:spcAft>
+              <a:defRPr b="1" sz="2000">
+                <a:solidFill>
+                  <a:srgbClr val="333333"/>
+                </a:solidFill>
+              </a:defRPr>
+            </a:pPr>
+            <a:r>
+              <a:t>Modifying Global:</a:t>
+            </a:r>
+          </a:p>
+          <a:p>
+            <a:pPr>
+              <a:spcAft>
+                <a:spcPts val="600"/>
+              </a:spcAft>
+              <a:defRPr sz="1600">
+                <a:solidFill>
+                  <a:srgbClr val="333333"/>
+                </a:solidFill>
+              </a:defRPr>
+            </a:pPr>
+            <a:r>
+              <a:t>count = 0</a:t>
+            </a:r>
+          </a:p>
+          <a:p>
+            <a:pPr>
+              <a:spcAft>
+                <a:spcPts val="600"/>
+              </a:spcAft>
+              <a:defRPr b="1" sz="2000">
+                <a:solidFill>
+                  <a:srgbClr val="333333"/>
+                </a:solidFill>
+              </a:defRPr>
+            </a:pPr>
+            <a:r>
+              <a:t>def increment():</a:t>
+            </a:r>
+          </a:p>
+          <a:p>
+            <a:pPr>
+              <a:spcAft>
+                <a:spcPts val="600"/>
+              </a:spcAft>
+              <a:defRPr sz="1600">
+                <a:solidFill>
+                  <a:srgbClr val="333333"/>
+                </a:solidFill>
+              </a:defRPr>
+            </a:pPr>
+            <a:r>
+              <a:t>    global count  # Declare to modify</a:t>
+            </a:r>
+          </a:p>
+          <a:p>
+            <a:pPr>
+              <a:spcAft>
+                <a:spcPts val="600"/>
+              </a:spcAft>
+              <a:defRPr sz="1600">
+                <a:solidFill>
+                  <a:srgbClr val="333333"/>
+                </a:solidFill>
+              </a:defRPr>
+            </a:pPr>
+            <a:r>
+              <a:t>    count += 1</a:t>
+            </a:r>
+          </a:p>
+          <a:p>
+            <a:pPr>
+              <a:spcAft>
+                <a:spcPts val="600"/>
+              </a:spcAft>
+              <a:defRPr b="1" sz="2000">
+                <a:solidFill>
+                  <a:srgbClr val="333333"/>
+                </a:solidFill>
+              </a:defRPr>
+            </a:pPr>
+            <a:r>
+              <a:t>Best Practice:</a:t>
+            </a:r>
+          </a:p>
+          <a:p>
+            <a:pPr lvl="1">
+              <a:spcAft>
+                <a:spcPts val="400"/>
+              </a:spcAft>
+              <a:defRPr sz="1600">
+                <a:solidFill>
+                  <a:srgbClr val="333333"/>
+                </a:solidFill>
+              </a:defRPr>
+            </a:pPr>
+            <a:r>
+              <a:t>• Avoid global variables when possible</a:t>
+            </a:r>
+          </a:p>
+          <a:p>
+            <a:pPr lvl="1">
+              <a:spcAft>
+                <a:spcPts val="400"/>
+              </a:spcAft>
+              <a:defRPr sz="1600">
+                <a:solidFill>
+                  <a:srgbClr val="333333"/>
+                </a:solidFill>
+              </a:defRPr>
+            </a:pPr>
+            <a:r>
+              <a:t>• Pass data through parameters</a:t>
+            </a:r>
+          </a:p>
+          <a:p>
+            <a:pPr lvl="1">
+              <a:spcAft>
+                <a:spcPts val="400"/>
+              </a:spcAft>
+              <a:defRPr sz="1600">
+                <a:solidFill>
+                  <a:srgbClr val="333333"/>
+                </a:solidFill>
+              </a:defRPr>
+            </a:pPr>
+            <a:r>
+              <a:t>• Return modified values</a:t>
             </a:r>
           </a:p>
         </p:txBody>
@@ -5647,7 +6390,7 @@
 </p:sld>
 </file>
 
-<file path=ppt/slides/slide7.xml><?xml version="1.0" encoding="utf-8"?>
+<file path=ppt/slides/slide8.xml><?xml version="1.0" encoding="utf-8"?>
 <p:sld xmlns:a="http://schemas.openxmlformats.org/drawingml/2006/main" xmlns:p="http://schemas.openxmlformats.org/presentationml/2006/main" xmlns:r="http://schemas.openxmlformats.org/officeDocument/2006/relationships">
   <p:cSld>
     <p:spTree>
@@ -5751,8 +6494,8 @@
         </p:nvSpPr>
         <p:spPr>
           <a:xfrm>
-            <a:off x="457200" y="365760"/>
-            <a:ext cx="10972800" cy="731520"/>
+            <a:off x="457200" y="320040"/>
+            <a:ext cx="10972800" cy="640080"/>
           </a:xfrm>
           <a:prstGeom prst="rect">
             <a:avLst/>
@@ -5766,71 +6509,28 @@
           <a:lstStyle/>
           <a:p>
             <a:pPr>
-              <a:defRPr sz="4000" b="1">
+              <a:defRPr sz="3600" b="1">
                 <a:solidFill>
                   <a:srgbClr val="003366"/>
                 </a:solidFill>
               </a:defRPr>
             </a:pPr>
             <a:r>
-              <a:t>Multiple Return Values 🎁</a:t>
-            </a:r>
-          </a:p>
-        </p:txBody>
-      </p:sp>
-      <p:sp>
-        <p:nvSpPr>
-          <p:cNvPr id="5" name="Rectangle 4"/>
-          <p:cNvSpPr/>
+              <a:t>Docstrings</a:t>
+            </a:r>
+          </a:p>
+        </p:txBody>
+      </p:sp>
+      <p:sp>
+        <p:nvSpPr>
+          <p:cNvPr id="5" name="TextBox 4"/>
+          <p:cNvSpPr txBox="1"/>
           <p:nvPr/>
         </p:nvSpPr>
         <p:spPr>
           <a:xfrm>
-            <a:off x="457200" y="1005840"/>
-            <a:ext cx="1828800" cy="45720"/>
-          </a:xfrm>
-          <a:prstGeom prst="rect">
-            <a:avLst/>
-          </a:prstGeom>
-          <a:solidFill>
-            <a:srgbClr val="0066CC"/>
-          </a:solidFill>
-          <a:ln>
-            <a:noFill/>
-          </a:ln>
-        </p:spPr>
-        <p:style>
-          <a:lnRef idx="1">
-            <a:schemeClr val="accent1"/>
-          </a:lnRef>
-          <a:fillRef idx="3">
-            <a:schemeClr val="accent1"/>
-          </a:fillRef>
-          <a:effectRef idx="2">
-            <a:schemeClr val="accent1"/>
-          </a:effectRef>
-          <a:fontRef idx="minor">
-            <a:schemeClr val="lt1"/>
-          </a:fontRef>
-        </p:style>
-        <p:txBody>
-          <a:bodyPr rtlCol="0" anchor="ctr"/>
-          <a:lstStyle/>
-          <a:p>
-            <a:pPr algn="ctr"/>
-          </a:p>
-        </p:txBody>
-      </p:sp>
-      <p:sp>
-        <p:nvSpPr>
-          <p:cNvPr id="6" name="TextBox 5"/>
-          <p:cNvSpPr txBox="1"/>
-          <p:nvPr/>
-        </p:nvSpPr>
-        <p:spPr>
-          <a:xfrm>
-            <a:off x="640080" y="1371600"/>
-            <a:ext cx="10789920" cy="4572000"/>
+            <a:off x="640080" y="1188720"/>
+            <a:ext cx="10789920" cy="5303520"/>
           </a:xfrm>
           <a:prstGeom prst="rect">
             <a:avLst/>
@@ -5845,46 +6545,286 @@
           <a:p>
             <a:pPr>
               <a:spcAft>
-                <a:spcPts val="800"/>
-              </a:spcAft>
-              <a:defRPr sz="2000" b="1">
-                <a:solidFill>
-                  <a:srgbClr val="333333"/>
-                </a:solidFill>
-              </a:defRPr>
-            </a:pPr>
-            <a:r>
-              <a:t>Python functions can return multiple values at once!</a:t>
-            </a:r>
-          </a:p>
-          <a:p>
-            <a:pPr>
-              <a:spcAft>
-                <a:spcPts val="800"/>
-              </a:spcAft>
-              <a:defRPr sz="2000" b="1">
-                <a:solidFill>
-                  <a:srgbClr val="333333"/>
-                </a:solidFill>
-              </a:defRPr>
-            </a:pPr>
-            <a:r>
-              <a:t>Returning Multiple Values:</a:t>
-            </a:r>
-          </a:p>
-          <a:p>
-            <a:pPr>
-              <a:spcAft>
-                <a:spcPts val="800"/>
-              </a:spcAft>
-              <a:defRPr sz="2000" b="1">
-                <a:solidFill>
-                  <a:srgbClr val="333333"/>
-                </a:solidFill>
-              </a:defRPr>
-            </a:pPr>
-            <a:r>
-              <a:t>Note:Multiple values are returned as a tuple</a:t>
+                <a:spcPts val="600"/>
+              </a:spcAft>
+              <a:defRPr b="1" sz="2000">
+                <a:solidFill>
+                  <a:srgbClr val="333333"/>
+                </a:solidFill>
+              </a:defRPr>
+            </a:pPr>
+            <a:r>
+              <a:t>Purpose: Document functions</a:t>
+            </a:r>
+          </a:p>
+          <a:p>
+            <a:pPr>
+              <a:spcAft>
+                <a:spcPts val="600"/>
+              </a:spcAft>
+              <a:defRPr b="1" sz="2000">
+                <a:solidFill>
+                  <a:srgbClr val="333333"/>
+                </a:solidFill>
+              </a:defRPr>
+            </a:pPr>
+            <a:r>
+              <a:t>Format:</a:t>
+            </a:r>
+          </a:p>
+          <a:p>
+            <a:pPr>
+              <a:spcAft>
+                <a:spcPts val="600"/>
+              </a:spcAft>
+              <a:defRPr b="1" sz="2000">
+                <a:solidFill>
+                  <a:srgbClr val="333333"/>
+                </a:solidFill>
+              </a:defRPr>
+            </a:pPr>
+            <a:r>
+              <a:t>def calculate_bmi(weight, height):</a:t>
+            </a:r>
+          </a:p>
+          <a:p>
+            <a:pPr>
+              <a:spcAft>
+                <a:spcPts val="600"/>
+              </a:spcAft>
+              <a:defRPr sz="1600">
+                <a:solidFill>
+                  <a:srgbClr val="333333"/>
+                </a:solidFill>
+              </a:defRPr>
+            </a:pPr>
+            <a:r>
+              <a:t>    """</a:t>
+            </a:r>
+          </a:p>
+          <a:p>
+            <a:pPr>
+              <a:spcAft>
+                <a:spcPts val="600"/>
+              </a:spcAft>
+              <a:defRPr sz="1600">
+                <a:solidFill>
+                  <a:srgbClr val="333333"/>
+                </a:solidFill>
+              </a:defRPr>
+            </a:pPr>
+            <a:r>
+              <a:t>    Calculate Body Mass Index.</a:t>
+            </a:r>
+          </a:p>
+          <a:p>
+            <a:pPr>
+              <a:spcAft>
+                <a:spcPts val="600"/>
+              </a:spcAft>
+              <a:defRPr sz="1600">
+                <a:solidFill>
+                  <a:srgbClr val="333333"/>
+                </a:solidFill>
+              </a:defRPr>
+            </a:pPr>
+            <a:r>
+              <a:t>    Args:</a:t>
+            </a:r>
+          </a:p>
+          <a:p>
+            <a:pPr>
+              <a:spcAft>
+                <a:spcPts val="600"/>
+              </a:spcAft>
+              <a:defRPr sz="1600">
+                <a:solidFill>
+                  <a:srgbClr val="333333"/>
+                </a:solidFill>
+              </a:defRPr>
+            </a:pPr>
+            <a:r>
+              <a:t>        weight (float): Weight in kg</a:t>
+            </a:r>
+          </a:p>
+          <a:p>
+            <a:pPr>
+              <a:spcAft>
+                <a:spcPts val="600"/>
+              </a:spcAft>
+              <a:defRPr sz="1600">
+                <a:solidFill>
+                  <a:srgbClr val="333333"/>
+                </a:solidFill>
+              </a:defRPr>
+            </a:pPr>
+            <a:r>
+              <a:t>        height (float): Height in meters</a:t>
+            </a:r>
+          </a:p>
+          <a:p>
+            <a:pPr>
+              <a:spcAft>
+                <a:spcPts val="600"/>
+              </a:spcAft>
+              <a:defRPr sz="1600">
+                <a:solidFill>
+                  <a:srgbClr val="333333"/>
+                </a:solidFill>
+              </a:defRPr>
+            </a:pPr>
+            <a:r>
+              <a:t>    Returns:</a:t>
+            </a:r>
+          </a:p>
+          <a:p>
+            <a:pPr>
+              <a:spcAft>
+                <a:spcPts val="600"/>
+              </a:spcAft>
+              <a:defRPr sz="1600">
+                <a:solidFill>
+                  <a:srgbClr val="333333"/>
+                </a:solidFill>
+              </a:defRPr>
+            </a:pPr>
+            <a:r>
+              <a:t>        float: BMI value</a:t>
+            </a:r>
+          </a:p>
+          <a:p>
+            <a:pPr>
+              <a:spcAft>
+                <a:spcPts val="600"/>
+              </a:spcAft>
+              <a:defRPr sz="1600">
+                <a:solidFill>
+                  <a:srgbClr val="333333"/>
+                </a:solidFill>
+              </a:defRPr>
+            </a:pPr>
+            <a:r>
+              <a:t>    """</a:t>
+            </a:r>
+          </a:p>
+          <a:p>
+            <a:pPr>
+              <a:spcAft>
+                <a:spcPts val="600"/>
+              </a:spcAft>
+              <a:defRPr sz="1600">
+                <a:solidFill>
+                  <a:srgbClr val="333333"/>
+                </a:solidFill>
+              </a:defRPr>
+            </a:pPr>
+            <a:r>
+              <a:t>    return weight / (height ** 2)</a:t>
+            </a:r>
+          </a:p>
+          <a:p>
+            <a:pPr>
+              <a:spcAft>
+                <a:spcPts val="600"/>
+              </a:spcAft>
+              <a:defRPr b="1" sz="2000">
+                <a:solidFill>
+                  <a:srgbClr val="333333"/>
+                </a:solidFill>
+              </a:defRPr>
+            </a:pPr>
+            <a:r>
+              <a:t>Accessing:</a:t>
+            </a:r>
+          </a:p>
+          <a:p>
+            <a:pPr>
+              <a:spcAft>
+                <a:spcPts val="600"/>
+              </a:spcAft>
+              <a:defRPr sz="1600">
+                <a:solidFill>
+                  <a:srgbClr val="333333"/>
+                </a:solidFill>
+              </a:defRPr>
+            </a:pPr>
+            <a:r>
+              <a:t>print(calculate_bmi.__doc__)</a:t>
+            </a:r>
+          </a:p>
+          <a:p>
+            <a:pPr>
+              <a:spcAft>
+                <a:spcPts val="600"/>
+              </a:spcAft>
+              <a:defRPr sz="1600">
+                <a:solidFill>
+                  <a:srgbClr val="333333"/>
+                </a:solidFill>
+              </a:defRPr>
+            </a:pPr>
+            <a:r>
+              <a:t>help(calculate_bmi)</a:t>
+            </a:r>
+          </a:p>
+          <a:p>
+            <a:pPr>
+              <a:spcAft>
+                <a:spcPts val="600"/>
+              </a:spcAft>
+              <a:defRPr b="1" sz="2000">
+                <a:solidFill>
+                  <a:srgbClr val="333333"/>
+                </a:solidFill>
+              </a:defRPr>
+            </a:pPr>
+            <a:r>
+              <a:t>Best Practice:</a:t>
+            </a:r>
+          </a:p>
+          <a:p>
+            <a:pPr lvl="1">
+              <a:spcAft>
+                <a:spcPts val="400"/>
+              </a:spcAft>
+              <a:defRPr sz="1600">
+                <a:solidFill>
+                  <a:srgbClr val="333333"/>
+                </a:solidFill>
+              </a:defRPr>
+            </a:pPr>
+            <a:r>
+              <a:t>• Always document complex functions</a:t>
+            </a:r>
+          </a:p>
+          <a:p>
+            <a:pPr lvl="1">
+              <a:spcAft>
+                <a:spcPts val="400"/>
+              </a:spcAft>
+              <a:defRPr sz="1600">
+                <a:solidFill>
+                  <a:srgbClr val="333333"/>
+                </a:solidFill>
+              </a:defRPr>
+            </a:pPr>
+            <a:r>
+              <a:t>• Explain parameters and return values</a:t>
+            </a:r>
+          </a:p>
+          <a:p>
+            <a:pPr lvl="1">
+              <a:spcAft>
+                <a:spcPts val="400"/>
+              </a:spcAft>
+              <a:defRPr sz="1600">
+                <a:solidFill>
+                  <a:srgbClr val="333333"/>
+                </a:solidFill>
+              </a:defRPr>
+            </a:pPr>
+            <a:r>
+              <a:t>• Include usage examples</a:t>
             </a:r>
           </a:p>
         </p:txBody>
@@ -5897,7 +6837,7 @@
 </p:sld>
 </file>
 
-<file path=ppt/slides/slide8.xml><?xml version="1.0" encoding="utf-8"?>
+<file path=ppt/slides/slide9.xml><?xml version="1.0" encoding="utf-8"?>
 <p:sld xmlns:a="http://schemas.openxmlformats.org/drawingml/2006/main" xmlns:p="http://schemas.openxmlformats.org/presentationml/2006/main" xmlns:r="http://schemas.openxmlformats.org/officeDocument/2006/relationships">
   <p:cSld>
     <p:spTree>
@@ -6001,8 +6941,8 @@
         </p:nvSpPr>
         <p:spPr>
           <a:xfrm>
-            <a:off x="457200" y="365760"/>
-            <a:ext cx="10972800" cy="731520"/>
+            <a:off x="457200" y="320040"/>
+            <a:ext cx="10972800" cy="640080"/>
           </a:xfrm>
           <a:prstGeom prst="rect">
             <a:avLst/>
@@ -6016,71 +6956,28 @@
           <a:lstStyle/>
           <a:p>
             <a:pPr>
-              <a:defRPr sz="4000" b="1">
+              <a:defRPr sz="3600" b="1">
                 <a:solidFill>
                   <a:srgbClr val="003366"/>
                 </a:solidFill>
               </a:defRPr>
             </a:pPr>
             <a:r>
-              <a:t>Variable Scope 🔍</a:t>
-            </a:r>
-          </a:p>
-        </p:txBody>
-      </p:sp>
-      <p:sp>
-        <p:nvSpPr>
-          <p:cNvPr id="5" name="Rectangle 4"/>
-          <p:cNvSpPr/>
+              <a:t>Lambda Functions</a:t>
+            </a:r>
+          </a:p>
+        </p:txBody>
+      </p:sp>
+      <p:sp>
+        <p:nvSpPr>
+          <p:cNvPr id="5" name="TextBox 4"/>
+          <p:cNvSpPr txBox="1"/>
           <p:nvPr/>
         </p:nvSpPr>
         <p:spPr>
           <a:xfrm>
-            <a:off x="457200" y="1005840"/>
-            <a:ext cx="1828800" cy="45720"/>
-          </a:xfrm>
-          <a:prstGeom prst="rect">
-            <a:avLst/>
-          </a:prstGeom>
-          <a:solidFill>
-            <a:srgbClr val="0066CC"/>
-          </a:solidFill>
-          <a:ln>
-            <a:noFill/>
-          </a:ln>
-        </p:spPr>
-        <p:style>
-          <a:lnRef idx="1">
-            <a:schemeClr val="accent1"/>
-          </a:lnRef>
-          <a:fillRef idx="3">
-            <a:schemeClr val="accent1"/>
-          </a:fillRef>
-          <a:effectRef idx="2">
-            <a:schemeClr val="accent1"/>
-          </a:effectRef>
-          <a:fontRef idx="minor">
-            <a:schemeClr val="lt1"/>
-          </a:fontRef>
-        </p:style>
-        <p:txBody>
-          <a:bodyPr rtlCol="0" anchor="ctr"/>
-          <a:lstStyle/>
-          <a:p>
-            <a:pPr algn="ctr"/>
-          </a:p>
-        </p:txBody>
-      </p:sp>
-      <p:sp>
-        <p:nvSpPr>
-          <p:cNvPr id="6" name="TextBox 5"/>
-          <p:cNvSpPr txBox="1"/>
-          <p:nvPr/>
-        </p:nvSpPr>
-        <p:spPr>
-          <a:xfrm>
-            <a:off x="640080" y="1371600"/>
-            <a:ext cx="10789920" cy="4572000"/>
+            <a:off x="640080" y="1188720"/>
+            <a:ext cx="10789920" cy="5303520"/>
           </a:xfrm>
           <a:prstGeom prst="rect">
             <a:avLst/>
@@ -6095,326 +6992,316 @@
           <a:p>
             <a:pPr>
               <a:spcAft>
-                <a:spcPts val="800"/>
-              </a:spcAft>
-              <a:defRPr sz="2000" b="1">
-                <a:solidFill>
-                  <a:srgbClr val="333333"/>
-                </a:solidFill>
-              </a:defRPr>
-            </a:pPr>
-            <a:r>
-              <a:t>Local Scope</a:t>
-            </a:r>
-          </a:p>
-          <a:p>
-            <a:pPr>
-              <a:spcAft>
-                <a:spcPts val="800"/>
-              </a:spcAft>
-              <a:defRPr sz="2000" b="1">
-                <a:solidFill>
-                  <a:srgbClr val="333333"/>
-                </a:solidFill>
-              </a:defRPr>
-            </a:pPr>
-            <a:r>
-              <a:t>Variables inside a function</a:t>
-            </a:r>
-          </a:p>
-          <a:p>
-            <a:pPr>
-              <a:spcAft>
-                <a:spcPts val="800"/>
-              </a:spcAft>
-              <a:defRPr sz="2000" b="1">
-                <a:solidFill>
-                  <a:srgbClr val="333333"/>
-                </a:solidFill>
-              </a:defRPr>
-            </a:pPr>
-            <a:r>
-              <a:t>Global Scope</a:t>
-            </a:r>
-          </a:p>
-          <a:p>
-            <a:pPr>
-              <a:spcAft>
-                <a:spcPts val="800"/>
-              </a:spcAft>
-              <a:defRPr sz="2000" b="1">
-                <a:solidFill>
-                  <a:srgbClr val="333333"/>
-                </a:solidFill>
-              </a:defRPr>
-            </a:pPr>
-            <a:r>
-              <a:t>Variables outside functions</a:t>
-            </a:r>
-          </a:p>
-          <a:p>
-            <a:pPr>
-              <a:spcAft>
-                <a:spcPts val="800"/>
-              </a:spcAft>
-              <a:defRPr sz="2000" b="1">
-                <a:solidFill>
-                  <a:srgbClr val="333333"/>
-                </a:solidFill>
-              </a:defRPr>
-            </a:pPr>
-            <a:r>
-              <a:t>Best Practice:Use local variables when possible. Keep functions self-contained!</a:t>
-            </a:r>
-          </a:p>
-        </p:txBody>
-      </p:sp>
-    </p:spTree>
-  </p:cSld>
-  <p:clrMapOvr>
-    <a:masterClrMapping/>
-  </p:clrMapOvr>
-</p:sld>
-</file>
-
-<file path=ppt/slides/slide9.xml><?xml version="1.0" encoding="utf-8"?>
-<p:sld xmlns:a="http://schemas.openxmlformats.org/drawingml/2006/main" xmlns:p="http://schemas.openxmlformats.org/presentationml/2006/main" xmlns:r="http://schemas.openxmlformats.org/officeDocument/2006/relationships">
-  <p:cSld>
-    <p:spTree>
-      <p:nvGrpSpPr>
-        <p:cNvPr id="1" name=""/>
-        <p:cNvGrpSpPr/>
-        <p:nvPr/>
-      </p:nvGrpSpPr>
-      <p:grpSpPr/>
-      <p:sp>
-        <p:nvSpPr>
-          <p:cNvPr id="2" name="Rectangle 1"/>
-          <p:cNvSpPr/>
-          <p:nvPr/>
-        </p:nvSpPr>
-        <p:spPr>
-          <a:xfrm>
-            <a:off x="0" y="0"/>
-            <a:ext cx="12191695" cy="6858000"/>
-          </a:xfrm>
-          <a:prstGeom prst="rect">
-            <a:avLst/>
-          </a:prstGeom>
-          <a:solidFill>
-            <a:srgbClr val="FFFFFF"/>
-          </a:solidFill>
-          <a:ln>
-            <a:noFill/>
-          </a:ln>
-        </p:spPr>
-        <p:style>
-          <a:lnRef idx="1">
-            <a:schemeClr val="accent1"/>
-          </a:lnRef>
-          <a:fillRef idx="3">
-            <a:schemeClr val="accent1"/>
-          </a:fillRef>
-          <a:effectRef idx="2">
-            <a:schemeClr val="accent1"/>
-          </a:effectRef>
-          <a:fontRef idx="minor">
-            <a:schemeClr val="lt1"/>
-          </a:fontRef>
-        </p:style>
-        <p:txBody>
-          <a:bodyPr rtlCol="0" anchor="ctr"/>
-          <a:lstStyle/>
-          <a:p>
-            <a:pPr algn="ctr"/>
-          </a:p>
-        </p:txBody>
-      </p:sp>
-      <p:sp>
-        <p:nvSpPr>
-          <p:cNvPr id="3" name="Rectangle 2"/>
-          <p:cNvSpPr/>
-          <p:nvPr/>
-        </p:nvSpPr>
-        <p:spPr>
-          <a:xfrm>
-            <a:off x="0" y="0"/>
-            <a:ext cx="12191695" cy="137160"/>
-          </a:xfrm>
-          <a:prstGeom prst="rect">
-            <a:avLst/>
-          </a:prstGeom>
-          <a:solidFill>
-            <a:srgbClr val="0066CC"/>
-          </a:solidFill>
-          <a:ln>
-            <a:noFill/>
-          </a:ln>
-        </p:spPr>
-        <p:style>
-          <a:lnRef idx="1">
-            <a:schemeClr val="accent1"/>
-          </a:lnRef>
-          <a:fillRef idx="3">
-            <a:schemeClr val="accent1"/>
-          </a:fillRef>
-          <a:effectRef idx="2">
-            <a:schemeClr val="accent1"/>
-          </a:effectRef>
-          <a:fontRef idx="minor">
-            <a:schemeClr val="lt1"/>
-          </a:fontRef>
-        </p:style>
-        <p:txBody>
-          <a:bodyPr rtlCol="0" anchor="ctr"/>
-          <a:lstStyle/>
-          <a:p>
-            <a:pPr algn="ctr"/>
-          </a:p>
-        </p:txBody>
-      </p:sp>
-      <p:sp>
-        <p:nvSpPr>
-          <p:cNvPr id="4" name="TextBox 3"/>
-          <p:cNvSpPr txBox="1"/>
-          <p:nvPr/>
-        </p:nvSpPr>
-        <p:spPr>
-          <a:xfrm>
-            <a:off x="457200" y="365760"/>
-            <a:ext cx="10972800" cy="731520"/>
-          </a:xfrm>
-          <a:prstGeom prst="rect">
-            <a:avLst/>
-          </a:prstGeom>
-          <a:noFill/>
-        </p:spPr>
-        <p:txBody>
-          <a:bodyPr wrap="none">
-            <a:spAutoFit/>
-          </a:bodyPr>
-          <a:lstStyle/>
-          <a:p>
-            <a:pPr>
-              <a:defRPr sz="4000" b="1">
-                <a:solidFill>
-                  <a:srgbClr val="003366"/>
-                </a:solidFill>
-              </a:defRPr>
-            </a:pPr>
-            <a:r>
-              <a:t>Docstrings - Documentation 📚</a:t>
-            </a:r>
-          </a:p>
-        </p:txBody>
-      </p:sp>
-      <p:sp>
-        <p:nvSpPr>
-          <p:cNvPr id="5" name="Rectangle 4"/>
-          <p:cNvSpPr/>
-          <p:nvPr/>
-        </p:nvSpPr>
-        <p:spPr>
-          <a:xfrm>
-            <a:off x="457200" y="1005840"/>
-            <a:ext cx="1828800" cy="45720"/>
-          </a:xfrm>
-          <a:prstGeom prst="rect">
-            <a:avLst/>
-          </a:prstGeom>
-          <a:solidFill>
-            <a:srgbClr val="0066CC"/>
-          </a:solidFill>
-          <a:ln>
-            <a:noFill/>
-          </a:ln>
-        </p:spPr>
-        <p:style>
-          <a:lnRef idx="1">
-            <a:schemeClr val="accent1"/>
-          </a:lnRef>
-          <a:fillRef idx="3">
-            <a:schemeClr val="accent1"/>
-          </a:fillRef>
-          <a:effectRef idx="2">
-            <a:schemeClr val="accent1"/>
-          </a:effectRef>
-          <a:fontRef idx="minor">
-            <a:schemeClr val="lt1"/>
-          </a:fontRef>
-        </p:style>
-        <p:txBody>
-          <a:bodyPr rtlCol="0" anchor="ctr"/>
-          <a:lstStyle/>
-          <a:p>
-            <a:pPr algn="ctr"/>
-          </a:p>
-        </p:txBody>
-      </p:sp>
-      <p:sp>
-        <p:nvSpPr>
-          <p:cNvPr id="6" name="TextBox 5"/>
-          <p:cNvSpPr txBox="1"/>
-          <p:nvPr/>
-        </p:nvSpPr>
-        <p:spPr>
-          <a:xfrm>
-            <a:off x="640080" y="1371600"/>
-            <a:ext cx="10789920" cy="4572000"/>
-          </a:xfrm>
-          <a:prstGeom prst="rect">
-            <a:avLst/>
-          </a:prstGeom>
-          <a:noFill/>
-        </p:spPr>
-        <p:txBody>
-          <a:bodyPr wrap="square">
-            <a:spAutoFit/>
-          </a:bodyPr>
-          <a:lstStyle/>
-          <a:p>
-            <a:pPr>
-              <a:spcAft>
-                <a:spcPts val="800"/>
-              </a:spcAft>
-              <a:defRPr sz="2000" b="1">
-                <a:solidFill>
-                  <a:srgbClr val="333333"/>
-                </a:solidFill>
-              </a:defRPr>
-            </a:pPr>
-            <a:r>
-              <a:t>Document your functions with docstrings (triple quotes)</a:t>
-            </a:r>
-          </a:p>
-          <a:p>
-            <a:pPr>
-              <a:spcAft>
-                <a:spcPts val="800"/>
-              </a:spcAft>
-              <a:defRPr sz="2000" b="1">
-                <a:solidFill>
-                  <a:srgbClr val="333333"/>
-                </a:solidFill>
-              </a:defRPr>
-            </a:pPr>
-            <a:r>
-              <a:t>Good Documentation:</a:t>
-            </a:r>
-          </a:p>
-          <a:p>
-            <a:pPr>
-              <a:spcAft>
-                <a:spcPts val="800"/>
-              </a:spcAft>
-              <a:defRPr sz="2000" b="1">
-                <a:solidFill>
-                  <a:srgbClr val="333333"/>
-                </a:solidFill>
-              </a:defRPr>
-            </a:pPr>
-            <a:r>
-              <a:t>Good documentation helps others (and future you!) understand your code</a:t>
+                <a:spcPts val="600"/>
+              </a:spcAft>
+              <a:defRPr b="1" sz="2000">
+                <a:solidFill>
+                  <a:srgbClr val="333333"/>
+                </a:solidFill>
+              </a:defRPr>
+            </a:pPr>
+            <a:r>
+              <a:t>Anonymous Functions:</a:t>
+            </a:r>
+          </a:p>
+          <a:p>
+            <a:pPr>
+              <a:spcAft>
+                <a:spcPts val="600"/>
+              </a:spcAft>
+              <a:defRPr b="1" sz="2000">
+                <a:solidFill>
+                  <a:srgbClr val="333333"/>
+                </a:solidFill>
+              </a:defRPr>
+            </a:pPr>
+            <a:r>
+              <a:t>lambda arguments: expression</a:t>
+            </a:r>
+          </a:p>
+          <a:p>
+            <a:pPr>
+              <a:spcAft>
+                <a:spcPts val="600"/>
+              </a:spcAft>
+              <a:defRPr b="1" sz="2000">
+                <a:solidFill>
+                  <a:srgbClr val="333333"/>
+                </a:solidFill>
+              </a:defRPr>
+            </a:pPr>
+            <a:r>
+              <a:t>Example:</a:t>
+            </a:r>
+          </a:p>
+          <a:p>
+            <a:pPr>
+              <a:spcAft>
+                <a:spcPts val="600"/>
+              </a:spcAft>
+              <a:defRPr b="1" sz="2000">
+                <a:solidFill>
+                  <a:srgbClr val="333333"/>
+                </a:solidFill>
+              </a:defRPr>
+            </a:pPr>
+            <a:r>
+              <a:t>square = lambda x: x ** 2</a:t>
+            </a:r>
+          </a:p>
+          <a:p>
+            <a:pPr>
+              <a:spcAft>
+                <a:spcPts val="600"/>
+              </a:spcAft>
+              <a:defRPr sz="1600">
+                <a:solidFill>
+                  <a:srgbClr val="333333"/>
+                </a:solidFill>
+              </a:defRPr>
+            </a:pPr>
+            <a:r>
+              <a:t>square(5)  # 25</a:t>
+            </a:r>
+          </a:p>
+          <a:p>
+            <a:pPr>
+              <a:spcAft>
+                <a:spcPts val="600"/>
+              </a:spcAft>
+              <a:defRPr b="1" sz="2000">
+                <a:solidFill>
+                  <a:srgbClr val="333333"/>
+                </a:solidFill>
+              </a:defRPr>
+            </a:pPr>
+            <a:r>
+              <a:t>Multiple Parameters:</a:t>
+            </a:r>
+          </a:p>
+          <a:p>
+            <a:pPr>
+              <a:spcAft>
+                <a:spcPts val="600"/>
+              </a:spcAft>
+              <a:defRPr b="1" sz="2000">
+                <a:solidFill>
+                  <a:srgbClr val="333333"/>
+                </a:solidFill>
+              </a:defRPr>
+            </a:pPr>
+            <a:r>
+              <a:t>add = lambda a, b: a + b</a:t>
+            </a:r>
+          </a:p>
+          <a:p>
+            <a:pPr>
+              <a:spcAft>
+                <a:spcPts val="600"/>
+              </a:spcAft>
+              <a:defRPr b="1" sz="2000">
+                <a:solidFill>
+                  <a:srgbClr val="333333"/>
+                </a:solidFill>
+              </a:defRPr>
+            </a:pPr>
+            <a:r>
+              <a:t>Common Use with sorted():</a:t>
+            </a:r>
+          </a:p>
+          <a:p>
+            <a:pPr>
+              <a:spcAft>
+                <a:spcPts val="600"/>
+              </a:spcAft>
+              <a:defRPr sz="1600">
+                <a:solidFill>
+                  <a:srgbClr val="333333"/>
+                </a:solidFill>
+              </a:defRPr>
+            </a:pPr>
+            <a:r>
+              <a:t>students = [</a:t>
+            </a:r>
+          </a:p>
+          <a:p>
+            <a:pPr>
+              <a:spcAft>
+                <a:spcPts val="600"/>
+              </a:spcAft>
+              <a:defRPr sz="1600">
+                <a:solidFill>
+                  <a:srgbClr val="333333"/>
+                </a:solidFill>
+              </a:defRPr>
+            </a:pPr>
+            <a:r>
+              <a:t>    {"name": "Alice", "grade": 85},</a:t>
+            </a:r>
+          </a:p>
+          <a:p>
+            <a:pPr>
+              <a:spcAft>
+                <a:spcPts val="600"/>
+              </a:spcAft>
+              <a:defRPr sz="1600">
+                <a:solidFill>
+                  <a:srgbClr val="333333"/>
+                </a:solidFill>
+              </a:defRPr>
+            </a:pPr>
+            <a:r>
+              <a:t>    {"name": "Bob", "grade": 92}</a:t>
+            </a:r>
+          </a:p>
+          <a:p>
+            <a:pPr>
+              <a:spcAft>
+                <a:spcPts val="600"/>
+              </a:spcAft>
+              <a:defRPr sz="1600">
+                <a:solidFill>
+                  <a:srgbClr val="333333"/>
+                </a:solidFill>
+              </a:defRPr>
+            </a:pPr>
+            <a:r>
+              <a:t>]</a:t>
+            </a:r>
+          </a:p>
+          <a:p>
+            <a:pPr>
+              <a:spcAft>
+                <a:spcPts val="600"/>
+              </a:spcAft>
+              <a:defRPr b="1" sz="2000">
+                <a:solidFill>
+                  <a:srgbClr val="333333"/>
+                </a:solidFill>
+              </a:defRPr>
+            </a:pPr>
+            <a:r>
+              <a:t>sorted(students, key=lambda s: s["grade"])</a:t>
+            </a:r>
+          </a:p>
+          <a:p>
+            <a:pPr>
+              <a:spcAft>
+                <a:spcPts val="600"/>
+              </a:spcAft>
+              <a:defRPr b="1" sz="2000">
+                <a:solidFill>
+                  <a:srgbClr val="333333"/>
+                </a:solidFill>
+              </a:defRPr>
+            </a:pPr>
+            <a:r>
+              <a:t>When to Use:</a:t>
+            </a:r>
+          </a:p>
+          <a:p>
+            <a:pPr lvl="1">
+              <a:spcAft>
+                <a:spcPts val="400"/>
+              </a:spcAft>
+              <a:defRPr sz="1600">
+                <a:solidFill>
+                  <a:srgbClr val="333333"/>
+                </a:solidFill>
+              </a:defRPr>
+            </a:pPr>
+            <a:r>
+              <a:t>• Short, simple functions</a:t>
+            </a:r>
+          </a:p>
+          <a:p>
+            <a:pPr lvl="1">
+              <a:spcAft>
+                <a:spcPts val="400"/>
+              </a:spcAft>
+              <a:defRPr sz="1600">
+                <a:solidFill>
+                  <a:srgbClr val="333333"/>
+                </a:solidFill>
+              </a:defRPr>
+            </a:pPr>
+            <a:r>
+              <a:t>• As arguments to other functions</a:t>
+            </a:r>
+          </a:p>
+          <a:p>
+            <a:pPr lvl="1">
+              <a:spcAft>
+                <a:spcPts val="400"/>
+              </a:spcAft>
+              <a:defRPr sz="1600">
+                <a:solidFill>
+                  <a:srgbClr val="333333"/>
+                </a:solidFill>
+              </a:defRPr>
+            </a:pPr>
+            <a:r>
+              <a:t>• One-time use</a:t>
+            </a:r>
+          </a:p>
+          <a:p>
+            <a:pPr>
+              <a:spcAft>
+                <a:spcPts val="600"/>
+              </a:spcAft>
+              <a:defRPr b="1" sz="2000">
+                <a:solidFill>
+                  <a:srgbClr val="333333"/>
+                </a:solidFill>
+              </a:defRPr>
+            </a:pPr>
+            <a:r>
+              <a:t>When NOT to Use:</a:t>
+            </a:r>
+          </a:p>
+          <a:p>
+            <a:pPr lvl="1">
+              <a:spcAft>
+                <a:spcPts val="400"/>
+              </a:spcAft>
+              <a:defRPr sz="1600">
+                <a:solidFill>
+                  <a:srgbClr val="333333"/>
+                </a:solidFill>
+              </a:defRPr>
+            </a:pPr>
+            <a:r>
+              <a:t>• Complex logic</a:t>
+            </a:r>
+          </a:p>
+          <a:p>
+            <a:pPr lvl="1">
+              <a:spcAft>
+                <a:spcPts val="400"/>
+              </a:spcAft>
+              <a:defRPr sz="1600">
+                <a:solidFill>
+                  <a:srgbClr val="333333"/>
+                </a:solidFill>
+              </a:defRPr>
+            </a:pPr>
+            <a:r>
+              <a:t>• Multiple statements</a:t>
+            </a:r>
+          </a:p>
+          <a:p>
+            <a:pPr lvl="1">
+              <a:spcAft>
+                <a:spcPts val="400"/>
+              </a:spcAft>
+              <a:defRPr sz="1600">
+                <a:solidFill>
+                  <a:srgbClr val="333333"/>
+                </a:solidFill>
+              </a:defRPr>
+            </a:pPr>
+            <a:r>
+              <a:t>• Need documentation</a:t>
             </a:r>
           </a:p>
         </p:txBody>
